--- a/Temas EB/Sesiones EB/Sesion 07/Sesion 07 - Incentivos a la contratacion y Empleo Neto.pptx
+++ b/Temas EB/Sesiones EB/Sesion 07/Sesion 07 - Incentivos a la contratacion y Empleo Neto.pptx
@@ -10,17 +10,17 @@
     <p:sldId id="258" r:id="rId4"/>
     <p:sldId id="259" r:id="rId5"/>
     <p:sldId id="260" r:id="rId6"/>
-    <p:sldId id="268" r:id="rId18"/>
-    <p:sldId id="261" r:id="rId7"/>
-    <p:sldId id="269" r:id="rId19"/>
-    <p:sldId id="262" r:id="rId8"/>
-    <p:sldId id="263" r:id="rId9"/>
-    <p:sldId id="264" r:id="rId10"/>
-    <p:sldId id="265" r:id="rId11"/>
-    <p:sldId id="270" r:id="rId20"/>
-    <p:sldId id="271" r:id="rId21"/>
-    <p:sldId id="267" r:id="rId12"/>
-    <p:sldId id="266" r:id="rId13"/>
+    <p:sldId id="268" r:id="rId7"/>
+    <p:sldId id="261" r:id="rId8"/>
+    <p:sldId id="269" r:id="rId9"/>
+    <p:sldId id="262" r:id="rId10"/>
+    <p:sldId id="263" r:id="rId11"/>
+    <p:sldId id="264" r:id="rId12"/>
+    <p:sldId id="265" r:id="rId13"/>
+    <p:sldId id="270" r:id="rId14"/>
+    <p:sldId id="271" r:id="rId15"/>
+    <p:sldId id="267" r:id="rId16"/>
+    <p:sldId id="266" r:id="rId17"/>
   </p:sldIdLst>
   <p:sldSz cx="12192000" cy="6858000"/>
   <p:notesSz cx="6858000" cy="9144000"/>
@@ -317,7 +317,7 @@
           <a:p>
             <a:fld id="{5BCAD085-E8A6-8845-BD4E-CB4CCA059FC4}" type="datetimeFigureOut">
               <a:rPr lang="en-US" smtClean="0"/>
-              <a:t>10/5/2026</a:t>
+              <a:t>10/6/2026</a:t>
             </a:fld>
             <a:endParaRPr lang="en-US"/>
           </a:p>
@@ -485,7 +485,7 @@
           <a:p>
             <a:fld id="{5BCAD085-E8A6-8845-BD4E-CB4CCA059FC4}" type="datetimeFigureOut">
               <a:rPr lang="en-US" smtClean="0"/>
-              <a:t>10/5/2026</a:t>
+              <a:t>10/6/2026</a:t>
             </a:fld>
             <a:endParaRPr lang="en-US"/>
           </a:p>
@@ -663,7 +663,7 @@
           <a:p>
             <a:fld id="{5BCAD085-E8A6-8845-BD4E-CB4CCA059FC4}" type="datetimeFigureOut">
               <a:rPr lang="en-US" smtClean="0"/>
-              <a:t>10/5/2026</a:t>
+              <a:t>10/6/2026</a:t>
             </a:fld>
             <a:endParaRPr lang="en-US"/>
           </a:p>
@@ -831,7 +831,7 @@
           <a:p>
             <a:fld id="{5BCAD085-E8A6-8845-BD4E-CB4CCA059FC4}" type="datetimeFigureOut">
               <a:rPr lang="en-US" smtClean="0"/>
-              <a:t>10/5/2026</a:t>
+              <a:t>10/6/2026</a:t>
             </a:fld>
             <a:endParaRPr lang="en-US"/>
           </a:p>
@@ -1076,7 +1076,7 @@
           <a:p>
             <a:fld id="{5BCAD085-E8A6-8845-BD4E-CB4CCA059FC4}" type="datetimeFigureOut">
               <a:rPr lang="en-US" smtClean="0"/>
-              <a:t>10/5/2026</a:t>
+              <a:t>10/6/2026</a:t>
             </a:fld>
             <a:endParaRPr lang="en-US"/>
           </a:p>
@@ -1361,7 +1361,7 @@
           <a:p>
             <a:fld id="{5BCAD085-E8A6-8845-BD4E-CB4CCA059FC4}" type="datetimeFigureOut">
               <a:rPr lang="en-US" smtClean="0"/>
-              <a:t>10/5/2026</a:t>
+              <a:t>10/6/2026</a:t>
             </a:fld>
             <a:endParaRPr lang="en-US"/>
           </a:p>
@@ -1780,7 +1780,7 @@
           <a:p>
             <a:fld id="{5BCAD085-E8A6-8845-BD4E-CB4CCA059FC4}" type="datetimeFigureOut">
               <a:rPr lang="en-US" smtClean="0"/>
-              <a:t>10/5/2026</a:t>
+              <a:t>10/6/2026</a:t>
             </a:fld>
             <a:endParaRPr lang="en-US"/>
           </a:p>
@@ -1897,7 +1897,7 @@
           <a:p>
             <a:fld id="{5BCAD085-E8A6-8845-BD4E-CB4CCA059FC4}" type="datetimeFigureOut">
               <a:rPr lang="en-US" smtClean="0"/>
-              <a:t>10/5/2026</a:t>
+              <a:t>10/6/2026</a:t>
             </a:fld>
             <a:endParaRPr lang="en-US"/>
           </a:p>
@@ -1992,7 +1992,7 @@
           <a:p>
             <a:fld id="{5BCAD085-E8A6-8845-BD4E-CB4CCA059FC4}" type="datetimeFigureOut">
               <a:rPr lang="en-US" smtClean="0"/>
-              <a:t>10/5/2026</a:t>
+              <a:t>10/6/2026</a:t>
             </a:fld>
             <a:endParaRPr lang="en-US"/>
           </a:p>
@@ -2267,7 +2267,7 @@
           <a:p>
             <a:fld id="{5BCAD085-E8A6-8845-BD4E-CB4CCA059FC4}" type="datetimeFigureOut">
               <a:rPr lang="en-US" smtClean="0"/>
-              <a:t>10/5/2026</a:t>
+              <a:t>10/6/2026</a:t>
             </a:fld>
             <a:endParaRPr lang="en-US"/>
           </a:p>
@@ -2519,7 +2519,7 @@
           <a:p>
             <a:fld id="{5BCAD085-E8A6-8845-BD4E-CB4CCA059FC4}" type="datetimeFigureOut">
               <a:rPr lang="en-US" smtClean="0"/>
-              <a:t>10/5/2026</a:t>
+              <a:t>10/6/2026</a:t>
             </a:fld>
             <a:endParaRPr lang="en-US"/>
           </a:p>
@@ -2730,7 +2730,7 @@
           <a:p>
             <a:fld id="{5BCAD085-E8A6-8845-BD4E-CB4CCA059FC4}" type="datetimeFigureOut">
               <a:rPr lang="en-US" smtClean="0"/>
-              <a:t>10/5/2026</a:t>
+              <a:t>10/6/2026</a:t>
             </a:fld>
             <a:endParaRPr lang="en-US"/>
           </a:p>
@@ -3445,7 +3445,7 @@
               </a:defRPr>
             </a:pPr>
             <a:r>
-              <a:t>FASE 4 · CASO REAL: PROGRAMA EMPLEA-T (§4.5)</a:t>
+              <a:t>FASE 3 · DEDUCCIÓN MATEMÁTICA Y ANÁLISIS DE COSTES (45–75 MIN)</a:t>
             </a:r>
           </a:p>
         </p:txBody>
@@ -3481,7 +3481,7 @@
               </a:defRPr>
             </a:pPr>
             <a:r>
-              <a:t>El Caso Andaluz: Incentivos Autonómicos y Salvaguardas</a:t>
+              <a:t>El Multiplicador Inverso del Coste Fiscal por Empleo Neto</a:t>
             </a:r>
           </a:p>
         </p:txBody>
@@ -3519,7 +3519,7 @@
         <p:spPr>
           <a:xfrm>
             <a:off x="731520" y="1371600"/>
-            <a:ext cx="5212080" cy="4846320"/>
+            <a:ext cx="5394960" cy="4846320"/>
           </a:xfrm>
           <a:prstGeom prst="roundRect">
             <a:avLst/>
@@ -3527,7 +3527,7 @@
           <a:solidFill>
             <a:srgbClr val="F4F8F5"/>
           </a:solidFill>
-          <a:ln>
+          <a:ln w="19050">
             <a:solidFill>
               <a:srgbClr val="76927A"/>
             </a:solidFill>
@@ -3563,15 +3563,15 @@
               </a:defRPr>
             </a:pPr>
             <a:r>
-              <a:t>🏛️ Líneas y Cuantías de Emplea-T (BOJA)</a:t>
+              <a:t>🧮 Deducción Paso a Paso de la Expresión</a:t>
             </a:r>
           </a:p>
           <a:p>
             <a:pPr>
               <a:spcAft>
-                <a:spcPts val="1200"/>
+                <a:spcPts val="800"/>
               </a:spcAft>
-              <a:defRPr sz="1600">
+              <a:defRPr sz="1500">
                 <a:solidFill>
                   <a:srgbClr val="2F3A30"/>
                 </a:solidFill>
@@ -3579,36 +3579,76 @@
               </a:defRPr>
             </a:pPr>
             <a:r>
-              <a:t>• Línea 1 (Jóvenes &lt; 30 años):</a:t>
+              <a:t>1. Gasto Público Total:</a:t>
             </a:r>
             <a:br/>
             <a:r>
-              <a:t>  Incentivo a la contratación indefinida ordinaria de jóvenes inscritos en Garantía Juvenil.</a:t>
+              <a:t>   Gasto = S · (Subvención nominal por contrato)</a:t>
+            </a:r>
+          </a:p>
+          <a:p>
+            <a:pPr>
+              <a:spcAft>
+                <a:spcPts val="800"/>
+              </a:spcAft>
+              <a:defRPr sz="1500">
+                <a:solidFill>
+                  <a:srgbClr val="2F3A30"/>
+                </a:solidFill>
+                <a:latin typeface="Calibri"/>
+              </a:defRPr>
+            </a:pPr>
+            <a:r>
+              <a:t>2. Empleo Neto Efectivo Creado:</a:t>
             </a:r>
             <a:br/>
             <a:r>
-              <a:t>  Importe base: 6.000 € (hasta 9.000 € en titulaciones altas y mujeres).</a:t>
+              <a:t>   Empleo neto = S · (1 − pm − s − d)</a:t>
             </a:r>
           </a:p>
           <a:p>
             <a:pPr>
-              <a:defRPr sz="1600">
-                <a:solidFill>
-                  <a:srgbClr val="2F3A30"/>
+              <a:spcAft>
+                <a:spcPts val="1000"/>
+              </a:spcAft>
+              <a:defRPr sz="1500" b="1">
+                <a:solidFill>
+                  <a:srgbClr val="113927"/>
                 </a:solidFill>
                 <a:latin typeface="Calibri"/>
               </a:defRPr>
             </a:pPr>
             <a:r>
-              <a:t>• Línea 2 (Colectivos Vulnerables):</a:t>
+              <a:t>3. Coste Fiscal Efectivo por Empleo Neto:</a:t>
             </a:r>
             <a:br/>
             <a:r>
-              <a:t>  Mayores de 45 años, parados de larga duración (&gt; 12 meses) y personas con discapacidad.</a:t>
+              <a:t>   Coste Neto = Gasto Total / Empleo Neto</a:t>
             </a:r>
             <a:br/>
             <a:r>
-              <a:t>  Importes: de 6.000 € hasta 20.000 € por contrato.</a:t>
+              <a:t>   Coste Neto = [S · Subvención] / [S · (1 − pm − s − d)]</a:t>
+            </a:r>
+          </a:p>
+          <a:p>
+            <a:pPr>
+              <a:defRPr sz="1500" b="1">
+                <a:solidFill>
+                  <a:srgbClr val="E98F71"/>
+                </a:solidFill>
+                <a:latin typeface="Outfit"/>
+              </a:defRPr>
+            </a:pPr>
+            <a:r>
+              <a:t>4. Expresión Final de los Apuntes (§4.4):</a:t>
+            </a:r>
+            <a:br/>
+            <a:r>
+              <a:t>   Coste Neto = Subvención / (1 − pm − s − d)</a:t>
+            </a:r>
+            <a:br/>
+            <a:r>
+              <a:t>   = Subvención · [ 1 / (1 − Pérdida Total) ]</a:t>
             </a:r>
           </a:p>
         </p:txBody>
@@ -3621,8 +3661,8 @@
         </p:nvSpPr>
         <p:spPr>
           <a:xfrm>
-            <a:off x="6217920" y="1371600"/>
-            <a:ext cx="5212080" cy="4846320"/>
+            <a:off x="6400800" y="1371600"/>
+            <a:ext cx="5029200" cy="4846320"/>
           </a:xfrm>
           <a:prstGeom prst="roundRect">
             <a:avLst/>
@@ -3666,7 +3706,23 @@
               </a:defRPr>
             </a:pPr>
             <a:r>
-              <a:t>🔒 El 'Doble Candado' Normativo</a:t>
+              <a:t>📈 Efecto Amplificador (Subvención: 6.000 €)</a:t>
+            </a:r>
+          </a:p>
+          <a:p>
+            <a:pPr>
+              <a:spcAft>
+                <a:spcPts val="1000"/>
+              </a:spcAft>
+              <a:defRPr sz="1400">
+                <a:solidFill>
+                  <a:srgbClr val="F4F8F5"/>
+                </a:solidFill>
+                <a:latin typeface="Calibri"/>
+              </a:defRPr>
+            </a:pPr>
+            <a:r>
+              <a:t>A medida que la ineficiencia (pm + s + d) aumenta, el denominador tiende a cero y el coste tiende a infinito:</a:t>
             </a:r>
           </a:p>
           <a:p>
@@ -3674,7 +3730,7 @@
               <a:spcAft>
                 <a:spcPts val="1200"/>
               </a:spcAft>
-              <a:defRPr sz="1600">
+              <a:defRPr sz="1500" b="1">
                 <a:solidFill>
                   <a:srgbClr val="FFFFFF"/>
                 </a:solidFill>
@@ -3682,31 +3738,27 @@
               </a:defRPr>
             </a:pPr>
             <a:r>
-              <a:t>1. Mantenimiento del Contrato (12 meses):</a:t>
+              <a:t>• Pérdida 0%:   Multiplicador = 1,0x  ➜  6.000 €</a:t>
             </a:r>
             <a:br/>
             <a:r>
-              <a:t>La persona contratada debe permanecer de alta obligatoria al menos un año ininterrumpido. El despido improcedente obliga al reintegro íntegro más intereses de demora.</a:t>
-            </a:r>
-          </a:p>
-          <a:p>
-            <a:pPr>
-              <a:spcAft>
-                <a:spcPts val="1200"/>
-              </a:spcAft>
-              <a:defRPr sz="1600">
-                <a:solidFill>
-                  <a:srgbClr val="FFFFFF"/>
-                </a:solidFill>
-                <a:latin typeface="Calibri"/>
-              </a:defRPr>
-            </a:pPr>
-            <a:r>
-              <a:t>2. Mantenimiento de Plantilla Fija:</a:t>
+              <a:t>• Pérdida 50%: Multiplicador = 2,0x  ➜ 12.000 €</a:t>
             </a:r>
             <a:br/>
             <a:r>
-              <a:t>La empresa no puede reducir su plantilla media fija durante los 12 meses posteriores a la subvención, combatiendo el efecto sustitución.</a:t>
+              <a:t>• Pérdida 75%: Multiplicador = 4,0x  ➜ 24.000 € (Apuntes)</a:t>
+            </a:r>
+            <a:br/>
+            <a:r>
+              <a:t>• Pérdida 80%: Multiplicador = 5,0x  ➜ 30.000 € (AIReF)</a:t>
+            </a:r>
+            <a:br/>
+            <a:r>
+              <a:t>• Pérdida 85%: Multiplicador = 6,7x  ➜ 40.000 €</a:t>
+            </a:r>
+            <a:br/>
+            <a:r>
+              <a:t>• Pérdida 90%: Multiplicador = 10,0x ➜ 60.000 €</a:t>
             </a:r>
           </a:p>
           <a:p>
@@ -3719,7 +3771,7 @@
               </a:defRPr>
             </a:pPr>
             <a:r>
-              <a:t>📌 Conexión EPD 4: La auditoría cuantitativa y simulación de costes salariales de esta Orden se realizará en la EPD 4 (Semana 10).</a:t>
+              <a:t>⚠️ Regla de Oro: Un programa con 80% de peso muerto quintuplica el coste real de cada empleo creado.</a:t>
             </a:r>
           </a:p>
         </p:txBody>
@@ -3780,7 +3832,7 @@
               </a:defRPr>
             </a:pPr>
             <a:r>
-              <a:t>FASE 5 · RETO MANUSCRITO INDIVIDUAL EN PAPEL (95–120 MIN)</a:t>
+              <a:t>FASE 3 · EVALUACIÓN DEL COSTE FISCAL EFECTIVO (45–75 MIN)</a:t>
             </a:r>
           </a:p>
         </p:txBody>
@@ -3816,7 +3868,7 @@
               </a:defRPr>
             </a:pPr>
             <a:r>
-              <a:t>Reto de Evaluación Continua · Tiempo Estricto: 10 Minutos</a:t>
+              <a:t>La Curva Hiperbólica del Coste por Empleo Neto</a:t>
             </a:r>
           </a:p>
         </p:txBody>
@@ -3845,120 +3897,9 @@
           </a:prstGeom>
         </p:spPr>
       </p:pic>
-      <p:sp>
-        <p:nvSpPr>
-          <p:cNvPr id="5" name="Rounded Rectangle 4"/>
-          <p:cNvSpPr/>
-          <p:nvPr/>
-        </p:nvSpPr>
-        <p:spPr>
-          <a:xfrm>
-            <a:off x="731520" y="1037400"/>
-            <a:ext cx="7232609" cy="5668198"/>
-          </a:xfrm>
-          <a:prstGeom prst="roundRect">
-            <a:avLst/>
-          </a:prstGeom>
-          <a:solidFill>
-            <a:srgbClr val="F4F8F5"/>
-          </a:solidFill>
-          <a:ln w="25400">
-            <a:solidFill>
-              <a:srgbClr val="E98F71"/>
-            </a:solidFill>
-          </a:ln>
-        </p:spPr>
-        <p:style>
-          <a:lnRef idx="1">
-            <a:schemeClr val="accent1"/>
-          </a:lnRef>
-          <a:fillRef idx="3">
-            <a:schemeClr val="accent1"/>
-          </a:fillRef>
-          <a:effectRef idx="2">
-            <a:schemeClr val="accent1"/>
-          </a:effectRef>
-          <a:fontRef idx="minor">
-            <a:schemeClr val="lt1"/>
-          </a:fontRef>
-        </p:style>
-        <p:txBody>
-          <a:bodyPr wrap="square" lIns="365760" tIns="365760" rIns="365760" rtlCol="0" anchor="ctr"/>
-          <a:lstStyle/>
-          <a:p>
-            <a:pPr algn="ctr">
-              <a:spcAft>
-                <a:spcPts val="1000"/>
-              </a:spcAft>
-              <a:defRPr sz="1400" b="1">
-                <a:solidFill>
-                  <a:srgbClr val="E98F71"/>
-                </a:solidFill>
-                <a:latin typeface="Outfit"/>
-              </a:defRPr>
-            </a:pPr>
-            <a:r>
-              <a:t>✍️ ENTORNO CONTROLADO: PANTALLAS CERRADAS Y MÓVILES GUARDADOS · SOLO LÁPIZ Y PAPEL</a:t>
-            </a:r>
-          </a:p>
-          <a:p>
-            <a:pPr>
-              <a:spcAft>
-                <a:spcPts val="1200"/>
-              </a:spcAft>
-              <a:defRPr sz="1600">
-                <a:solidFill>
-                  <a:srgbClr val="2F3A30"/>
-                </a:solidFill>
-                <a:latin typeface="Calibri"/>
-              </a:defRPr>
-            </a:pPr>
-            <a:r>
-              <a:t>Una comunidad autónoma aprueba un plan de empleo de 30 Millones de Euros (30 M€). Concede 6.000 € a fondo perdido por cada contrato indefinido formalizado con desempleados mayores de 45 años (exigiendo 12 meses de permanencia). Se agota el presupuesto formalizando 5.000 contratos subvencionados.</a:t>
-            </a:r>
-            <a:br/>
-            <a:br/>
-            <a:r>
-              <a:t>La evaluación ex-post arroja los siguientes datos: Tasa de Peso Muerto = 65%, Tasa de Sustitución = 15%, Tasa de Desplazamiento = 5%.</a:t>
-            </a:r>
-          </a:p>
-          <a:p>
-            <a:pPr>
-              <a:defRPr sz="1600" b="1">
-                <a:solidFill>
-                  <a:srgbClr val="113927"/>
-                </a:solidFill>
-                <a:latin typeface="Calibri"/>
-              </a:defRPr>
-            </a:pPr>
-            <a:r>
-              <a:t>a) Cálculo del Empleo Neto y Eficacia Fiscal (0 – 500 pts):</a:t>
-            </a:r>
-            <a:br/>
-            <a:r>
-              <a:t>Calcula el número exacto de empleos netos reales creados (ΔN_neto) y el coste fiscal efectivo por cada empleo adicional. Compara este coste real con los 6.000 € nominales de la ayuda.</a:t>
-            </a:r>
-            <a:br/>
-            <a:br/>
-            <a:r>
-              <a:t>b) Rediseño Institucional y Salvaguardas Normativas (0 – 500 pts):</a:t>
-            </a:r>
-            <a:br/>
-            <a:r>
-              <a:t>Como economista laboral, formula y justifica DOS cláusulas técnicas de condicionalidad que el regulador público debería introducir en la orden de bases para blindar la eficacia del programa frente al peso muerto y la sustitución.</a:t>
-            </a:r>
-          </a:p>
-        </p:txBody>
-      </p:sp>
       <p:pic>
         <p:nvPicPr>
-          <p:cNvPr id="6" name="Imagen 5" descr="Código QR">
-            <a:extLst>
-              <a:ext uri="{FF2B5EF4-FFF2-40B4-BE49-F238E27FC236}">
-                <a16:creationId xmlns:a16="http://schemas.microsoft.com/office/drawing/2014/main" id="{7FD80CFF-3BCF-109D-5B83-1A6B63FC60CA}"/>
-              </a:ext>
-            </a:extLst>
-          </p:cNvPr>
+          <p:cNvPr id="5" name="Picture 4" descr="figura_coste_empleo_neto.png"/>
           <p:cNvPicPr>
             <a:picLocks noChangeAspect="1"/>
           </p:cNvPicPr>
@@ -3972,14 +3913,145 @@
         </p:blipFill>
         <p:spPr>
           <a:xfrm>
-            <a:off x="8245823" y="2005779"/>
-            <a:ext cx="3584941" cy="3584941"/>
+            <a:off x="731520" y="1371600"/>
+            <a:ext cx="7132320" cy="4846320"/>
           </a:xfrm>
           <a:prstGeom prst="rect">
             <a:avLst/>
           </a:prstGeom>
         </p:spPr>
       </p:pic>
+      <p:sp>
+        <p:nvSpPr>
+          <p:cNvPr id="6" name="Rounded Rectangle 5"/>
+          <p:cNvSpPr/>
+          <p:nvPr/>
+        </p:nvSpPr>
+        <p:spPr>
+          <a:xfrm>
+            <a:off x="8138160" y="1371600"/>
+            <a:ext cx="3291840" cy="4846320"/>
+          </a:xfrm>
+          <a:prstGeom prst="roundRect">
+            <a:avLst/>
+          </a:prstGeom>
+          <a:solidFill>
+            <a:srgbClr val="F4F8F5"/>
+          </a:solidFill>
+          <a:ln w="19050">
+            <a:solidFill>
+              <a:srgbClr val="E98F71"/>
+            </a:solidFill>
+          </a:ln>
+        </p:spPr>
+        <p:style>
+          <a:lnRef idx="1">
+            <a:schemeClr val="accent1"/>
+          </a:lnRef>
+          <a:fillRef idx="3">
+            <a:schemeClr val="accent1"/>
+          </a:fillRef>
+          <a:effectRef idx="2">
+            <a:schemeClr val="accent1"/>
+          </a:effectRef>
+          <a:fontRef idx="minor">
+            <a:schemeClr val="lt1"/>
+          </a:fontRef>
+        </p:style>
+        <p:txBody>
+          <a:bodyPr wrap="square" lIns="274320" tIns="274320" rIns="274320" rtlCol="0" anchor="ctr"/>
+          <a:lstStyle/>
+          <a:p>
+            <a:pPr algn="ctr">
+              <a:spcAft>
+                <a:spcPts val="1000"/>
+              </a:spcAft>
+              <a:defRPr sz="1700" b="1">
+                <a:solidFill>
+                  <a:srgbClr val="113927"/>
+                </a:solidFill>
+                <a:latin typeface="Outfit"/>
+              </a:defRPr>
+            </a:pPr>
+            <a:r>
+              <a:t>💡 Lección de Hacienda Pública</a:t>
+            </a:r>
+          </a:p>
+          <a:p>
+            <a:pPr>
+              <a:spcAft>
+                <a:spcPts val="1200"/>
+              </a:spcAft>
+              <a:defRPr sz="1400" b="1">
+                <a:solidFill>
+                  <a:srgbClr val="E98F71"/>
+                </a:solidFill>
+                <a:latin typeface="Outfit"/>
+              </a:defRPr>
+            </a:pPr>
+            <a:r>
+              <a:t>Coste Neto = Subvención / [1 - Pérdida Total]</a:t>
+            </a:r>
+          </a:p>
+          <a:p>
+            <a:pPr>
+              <a:spcAft>
+                <a:spcPts val="1000"/>
+              </a:spcAft>
+              <a:defRPr sz="1600" b="1">
+                <a:solidFill>
+                  <a:srgbClr val="2F3A30"/>
+                </a:solidFill>
+                <a:latin typeface="Calibri"/>
+              </a:defRPr>
+            </a:pPr>
+            <a:r>
+              <a:t>• Con 0% ineficiencia:</a:t>
+            </a:r>
+            <a:br/>
+            <a:r>
+              <a:t>  Coste = 6.000 €</a:t>
+            </a:r>
+            <a:br/>
+            <a:r>
+              <a:t>• Con 50% ineficiencia:</a:t>
+            </a:r>
+            <a:br/>
+            <a:r>
+              <a:t>  Coste = 12.000 €</a:t>
+            </a:r>
+            <a:br/>
+            <a:r>
+              <a:t>• Con 70% ineficiencia:</a:t>
+            </a:r>
+            <a:br/>
+            <a:r>
+              <a:t>  Coste = 20.000 €</a:t>
+            </a:r>
+            <a:br/>
+            <a:r>
+              <a:t>• Con 85% ineficiencia:</a:t>
+            </a:r>
+            <a:br/>
+            <a:r>
+              <a:t>  Coste = 40.000 € por empleo neto!</a:t>
+            </a:r>
+          </a:p>
+          <a:p>
+            <a:pPr>
+              <a:defRPr sz="1500">
+                <a:solidFill>
+                  <a:srgbClr val="64748B"/>
+                </a:solidFill>
+                <a:latin typeface="Calibri"/>
+              </a:defRPr>
+            </a:pPr>
+            <a:r>
+              <a:t>El dinero público no es gratis: financiar contrataciones rutinarias dispara el coste a niveles socialmente inasumibles.</a:t>
+            </a:r>
+          </a:p>
+        </p:txBody>
+      </p:sp>
     </p:spTree>
   </p:cSld>
   <p:clrMapOvr>
@@ -4036,7 +4108,7 @@
               </a:defRPr>
             </a:pPr>
             <a:r>
-              <a:t>FASE 4 · TALLER ACTIVO Y LANZADERA INMEDIATA (75–95 MIN)</a:t>
+              <a:t>FASE 4 · CASO REAL: PROGRAMA EMPLEA-T (§4.5)</a:t>
             </a:r>
           </a:p>
         </p:txBody>
@@ -4072,7 +4144,7 @@
               </a:defRPr>
             </a:pPr>
             <a:r>
-              <a:t>Al Terminar esta Sesión: Arranque de la EPD 1 en Informática</a:t>
+              <a:t>El Caso Andaluz: Incentivos Autonómicos y Salvaguardas</a:t>
             </a:r>
           </a:p>
         </p:txBody>
@@ -4110,6 +4182,1620 @@
         <p:spPr>
           <a:xfrm>
             <a:off x="731520" y="1371600"/>
+            <a:ext cx="5212080" cy="4846320"/>
+          </a:xfrm>
+          <a:prstGeom prst="roundRect">
+            <a:avLst/>
+          </a:prstGeom>
+          <a:solidFill>
+            <a:srgbClr val="F4F8F5"/>
+          </a:solidFill>
+          <a:ln>
+            <a:solidFill>
+              <a:srgbClr val="76927A"/>
+            </a:solidFill>
+          </a:ln>
+        </p:spPr>
+        <p:style>
+          <a:lnRef idx="1">
+            <a:schemeClr val="accent1"/>
+          </a:lnRef>
+          <a:fillRef idx="3">
+            <a:schemeClr val="accent1"/>
+          </a:fillRef>
+          <a:effectRef idx="2">
+            <a:schemeClr val="accent1"/>
+          </a:effectRef>
+          <a:fontRef idx="minor">
+            <a:schemeClr val="lt1"/>
+          </a:fontRef>
+        </p:style>
+        <p:txBody>
+          <a:bodyPr wrap="square" lIns="274320" tIns="274320" rIns="274320" rtlCol="0" anchor="ctr"/>
+          <a:lstStyle/>
+          <a:p>
+            <a:pPr algn="ctr">
+              <a:spcAft>
+                <a:spcPts val="1000"/>
+              </a:spcAft>
+              <a:defRPr sz="1700" b="1">
+                <a:solidFill>
+                  <a:srgbClr val="113927"/>
+                </a:solidFill>
+                <a:latin typeface="Outfit"/>
+              </a:defRPr>
+            </a:pPr>
+            <a:r>
+              <a:t>🏛️ Líneas y Cuantías de Emplea-T (BOJA)</a:t>
+            </a:r>
+          </a:p>
+          <a:p>
+            <a:pPr>
+              <a:spcAft>
+                <a:spcPts val="1200"/>
+              </a:spcAft>
+              <a:defRPr sz="1600">
+                <a:solidFill>
+                  <a:srgbClr val="2F3A30"/>
+                </a:solidFill>
+                <a:latin typeface="Calibri"/>
+              </a:defRPr>
+            </a:pPr>
+            <a:r>
+              <a:t>• Línea 1 (Jóvenes &lt; 30 años):</a:t>
+            </a:r>
+            <a:br/>
+            <a:r>
+              <a:t>  Incentivo a la contratación indefinida ordinaria de jóvenes inscritos en Garantía Juvenil.</a:t>
+            </a:r>
+            <a:br/>
+            <a:r>
+              <a:t>  Importe base: 6.000 € (hasta 9.000 € en titulaciones altas y mujeres).</a:t>
+            </a:r>
+          </a:p>
+          <a:p>
+            <a:pPr>
+              <a:defRPr sz="1600">
+                <a:solidFill>
+                  <a:srgbClr val="2F3A30"/>
+                </a:solidFill>
+                <a:latin typeface="Calibri"/>
+              </a:defRPr>
+            </a:pPr>
+            <a:r>
+              <a:t>• Línea 2 (Colectivos Vulnerables):</a:t>
+            </a:r>
+            <a:br/>
+            <a:r>
+              <a:t>  Mayores de 45 años, parados de larga duración (&gt; 12 meses) y personas con discapacidad.</a:t>
+            </a:r>
+            <a:br/>
+            <a:r>
+              <a:t>  Importes: de 6.000 € hasta 20.000 € por contrato.</a:t>
+            </a:r>
+          </a:p>
+        </p:txBody>
+      </p:sp>
+      <p:sp>
+        <p:nvSpPr>
+          <p:cNvPr id="6" name="Rounded Rectangle 5"/>
+          <p:cNvSpPr/>
+          <p:nvPr/>
+        </p:nvSpPr>
+        <p:spPr>
+          <a:xfrm>
+            <a:off x="6217920" y="1371600"/>
+            <a:ext cx="5212080" cy="4846320"/>
+          </a:xfrm>
+          <a:prstGeom prst="roundRect">
+            <a:avLst/>
+          </a:prstGeom>
+          <a:solidFill>
+            <a:srgbClr val="113927"/>
+          </a:solidFill>
+          <a:ln>
+            <a:solidFill>
+              <a:srgbClr val="113927"/>
+            </a:solidFill>
+          </a:ln>
+        </p:spPr>
+        <p:style>
+          <a:lnRef idx="1">
+            <a:schemeClr val="accent1"/>
+          </a:lnRef>
+          <a:fillRef idx="3">
+            <a:schemeClr val="accent1"/>
+          </a:fillRef>
+          <a:effectRef idx="2">
+            <a:schemeClr val="accent1"/>
+          </a:effectRef>
+          <a:fontRef idx="minor">
+            <a:schemeClr val="lt1"/>
+          </a:fontRef>
+        </p:style>
+        <p:txBody>
+          <a:bodyPr wrap="square" lIns="274320" tIns="274320" rIns="274320" rtlCol="0" anchor="ctr"/>
+          <a:lstStyle/>
+          <a:p>
+            <a:pPr algn="ctr">
+              <a:spcAft>
+                <a:spcPts val="1000"/>
+              </a:spcAft>
+              <a:defRPr sz="1700" b="1">
+                <a:solidFill>
+                  <a:srgbClr val="EDB090"/>
+                </a:solidFill>
+                <a:latin typeface="Outfit"/>
+              </a:defRPr>
+            </a:pPr>
+            <a:r>
+              <a:t>🔒 El 'Doble Candado' Normativo</a:t>
+            </a:r>
+          </a:p>
+          <a:p>
+            <a:pPr>
+              <a:spcAft>
+                <a:spcPts val="1200"/>
+              </a:spcAft>
+              <a:defRPr sz="1600">
+                <a:solidFill>
+                  <a:srgbClr val="FFFFFF"/>
+                </a:solidFill>
+                <a:latin typeface="Calibri"/>
+              </a:defRPr>
+            </a:pPr>
+            <a:r>
+              <a:t>1. Mantenimiento del Contrato (12 meses):</a:t>
+            </a:r>
+            <a:br/>
+            <a:r>
+              <a:t>La persona contratada debe permanecer de alta obligatoria al menos un año ininterrumpido. El despido improcedente obliga al reintegro íntegro más intereses de demora.</a:t>
+            </a:r>
+          </a:p>
+          <a:p>
+            <a:pPr>
+              <a:spcAft>
+                <a:spcPts val="1200"/>
+              </a:spcAft>
+              <a:defRPr sz="1600">
+                <a:solidFill>
+                  <a:srgbClr val="FFFFFF"/>
+                </a:solidFill>
+                <a:latin typeface="Calibri"/>
+              </a:defRPr>
+            </a:pPr>
+            <a:r>
+              <a:t>2. Mantenimiento de Plantilla Fija:</a:t>
+            </a:r>
+            <a:br/>
+            <a:r>
+              <a:t>La empresa no puede reducir su plantilla media fija durante los 12 meses posteriores a la subvención, combatiendo el efecto sustitución.</a:t>
+            </a:r>
+          </a:p>
+          <a:p>
+            <a:pPr>
+              <a:defRPr sz="1500" b="1">
+                <a:solidFill>
+                  <a:srgbClr val="E98F71"/>
+                </a:solidFill>
+                <a:latin typeface="Calibri"/>
+              </a:defRPr>
+            </a:pPr>
+            <a:r>
+              <a:t>📌 Conexión EPD 4: La auditoría cuantitativa y simulación de costes salariales de esta Orden se realizará en la EPD 4 (Semana 10).</a:t>
+            </a:r>
+          </a:p>
+        </p:txBody>
+      </p:sp>
+    </p:spTree>
+  </p:cSld>
+  <p:clrMapOvr>
+    <a:masterClrMapping/>
+  </p:clrMapOvr>
+</p:sld>
+</file>
+
+<file path=ppt/slides/slide13.xml><?xml version="1.0" encoding="utf-8"?>
+<p:sld xmlns:a="http://schemas.openxmlformats.org/drawingml/2006/main" xmlns:r="http://schemas.openxmlformats.org/officeDocument/2006/relationships" xmlns:p="http://schemas.openxmlformats.org/presentationml/2006/main">
+  <p:cSld>
+    <p:spTree>
+      <p:nvGrpSpPr>
+        <p:cNvPr id="1" name=""/>
+        <p:cNvGrpSpPr/>
+        <p:nvPr/>
+      </p:nvGrpSpPr>
+      <p:grpSpPr>
+        <a:xfrm>
+          <a:off x="0" y="0"/>
+          <a:ext cx="0" cy="0"/>
+          <a:chOff x="0" y="0"/>
+          <a:chExt cx="0" cy="0"/>
+        </a:xfrm>
+      </p:grpSpPr>
+      <p:sp>
+        <p:nvSpPr>
+          <p:cNvPr id="2" name="TextBox 1"/>
+          <p:cNvSpPr txBox="1"/>
+          <p:nvPr/>
+        </p:nvSpPr>
+        <p:spPr>
+          <a:xfrm>
+            <a:off x="731520" y="365760"/>
+            <a:ext cx="9144000" cy="320040"/>
+          </a:xfrm>
+          <a:prstGeom prst="rect">
+            <a:avLst/>
+          </a:prstGeom>
+          <a:noFill/>
+        </p:spPr>
+        <p:txBody>
+          <a:bodyPr wrap="square" lIns="0" tIns="0" rIns="0" bIns="0">
+            <a:spAutoFit/>
+          </a:bodyPr>
+          <a:lstStyle/>
+          <a:p>
+            <a:pPr>
+              <a:defRPr sz="1100" b="1">
+                <a:solidFill>
+                  <a:srgbClr val="76927A"/>
+                </a:solidFill>
+                <a:latin typeface="Outfit"/>
+              </a:defRPr>
+            </a:pPr>
+            <a:r>
+              <a:t>FASE 4 · MARCO INSTITUCIONAL Y FINANCIACIÓN (75–95 MIN)</a:t>
+            </a:r>
+          </a:p>
+        </p:txBody>
+      </p:sp>
+      <p:sp>
+        <p:nvSpPr>
+          <p:cNvPr id="3" name="TextBox 2"/>
+          <p:cNvSpPr txBox="1"/>
+          <p:nvPr/>
+        </p:nvSpPr>
+        <p:spPr>
+          <a:xfrm>
+            <a:off x="731520" y="658368"/>
+            <a:ext cx="9601200" cy="502920"/>
+          </a:xfrm>
+          <a:prstGeom prst="rect">
+            <a:avLst/>
+          </a:prstGeom>
+          <a:noFill/>
+        </p:spPr>
+        <p:txBody>
+          <a:bodyPr wrap="square" lIns="0" tIns="0" rIns="0" bIns="0">
+            <a:spAutoFit/>
+          </a:bodyPr>
+          <a:lstStyle/>
+          <a:p>
+            <a:pPr>
+              <a:defRPr sz="2400" b="1">
+                <a:solidFill>
+                  <a:srgbClr val="113927"/>
+                </a:solidFill>
+                <a:latin typeface="Outfit"/>
+              </a:defRPr>
+            </a:pPr>
+            <a:r>
+              <a:t>La Arquitectura Financiera Europea: Del FSE+ a las CCAA (§5.1 - §5.2)</a:t>
+            </a:r>
+          </a:p>
+        </p:txBody>
+      </p:sp>
+      <p:pic>
+        <p:nvPicPr>
+          <p:cNvPr id="4" name="Picture 3" descr="image.png"/>
+          <p:cNvPicPr>
+            <a:picLocks noChangeAspect="1"/>
+          </p:cNvPicPr>
+          <p:nvPr/>
+        </p:nvPicPr>
+        <p:blipFill>
+          <a:blip r:embed="rId2"/>
+          <a:stretch>
+            <a:fillRect/>
+          </a:stretch>
+        </p:blipFill>
+        <p:spPr>
+          <a:xfrm>
+            <a:off x="10515600" y="411480"/>
+            <a:ext cx="926287" cy="292608"/>
+          </a:xfrm>
+          <a:prstGeom prst="rect">
+            <a:avLst/>
+          </a:prstGeom>
+        </p:spPr>
+      </p:pic>
+      <p:sp>
+        <p:nvSpPr>
+          <p:cNvPr id="5" name="Rounded Rectangle 4"/>
+          <p:cNvSpPr/>
+          <p:nvPr/>
+        </p:nvSpPr>
+        <p:spPr>
+          <a:xfrm>
+            <a:off x="731520" y="1371600"/>
+            <a:ext cx="5212080" cy="4846320"/>
+          </a:xfrm>
+          <a:prstGeom prst="roundRect">
+            <a:avLst/>
+          </a:prstGeom>
+          <a:solidFill>
+            <a:srgbClr val="F4F8F5"/>
+          </a:solidFill>
+          <a:ln w="19050">
+            <a:solidFill>
+              <a:srgbClr val="76927A"/>
+            </a:solidFill>
+          </a:ln>
+        </p:spPr>
+        <p:style>
+          <a:lnRef idx="1">
+            <a:schemeClr val="accent1"/>
+          </a:lnRef>
+          <a:fillRef idx="3">
+            <a:schemeClr val="accent1"/>
+          </a:fillRef>
+          <a:effectRef idx="2">
+            <a:schemeClr val="accent1"/>
+          </a:effectRef>
+          <a:fontRef idx="minor">
+            <a:schemeClr val="lt1"/>
+          </a:fontRef>
+        </p:style>
+        <p:txBody>
+          <a:bodyPr wrap="square" lIns="274320" tIns="274320" rIns="274320" rtlCol="0" anchor="ctr"/>
+          <a:lstStyle/>
+          <a:p>
+            <a:pPr algn="ctr">
+              <a:spcAft>
+                <a:spcPts val="800"/>
+              </a:spcAft>
+              <a:defRPr sz="1600" b="1">
+                <a:solidFill>
+                  <a:srgbClr val="113927"/>
+                </a:solidFill>
+                <a:latin typeface="Outfit"/>
+              </a:defRPr>
+            </a:pPr>
+            <a:r>
+              <a:t>🇪🇺 ¿Quién Financia los Incentivos? El FSE+ 2021-2027</a:t>
+            </a:r>
+          </a:p>
+          <a:p>
+            <a:pPr>
+              <a:spcAft>
+                <a:spcPts val="1200"/>
+              </a:spcAft>
+              <a:defRPr sz="1500">
+                <a:solidFill>
+                  <a:srgbClr val="2F3A30"/>
+                </a:solidFill>
+                <a:latin typeface="Calibri"/>
+              </a:defRPr>
+            </a:pPr>
+            <a:r>
+              <a:t>• Cofinanciación europea: El Programa Emplea-T y las principales ayudas autonómicas están cofinanciadas por el Fondo Social Europeo Plus (FSE+).</a:t>
+            </a:r>
+            <a:br/>
+            <a:r>
+              <a:t>• En Andalucía (región en transición), la Unión Europea aporta hasta el 85% de cada euro gastado en contratación indefinida.</a:t>
+            </a:r>
+          </a:p>
+          <a:p>
+            <a:pPr>
+              <a:defRPr sz="1500">
+                <a:solidFill>
+                  <a:srgbClr val="2F3A30"/>
+                </a:solidFill>
+                <a:latin typeface="Calibri"/>
+              </a:defRPr>
+            </a:pPr>
+            <a:r>
+              <a:t>• Gobernanza y Semestre Europeo: El Reglamento UE 2021/1057 condiciona estos fondos al cumplimiento de las Recomendaciones Específicas por País (CSR) del Consejo de la UE.</a:t>
+            </a:r>
+          </a:p>
+        </p:txBody>
+      </p:sp>
+      <p:sp>
+        <p:nvSpPr>
+          <p:cNvPr id="6" name="Rounded Rectangle 5"/>
+          <p:cNvSpPr/>
+          <p:nvPr/>
+        </p:nvSpPr>
+        <p:spPr>
+          <a:xfrm>
+            <a:off x="6217920" y="1371600"/>
+            <a:ext cx="5212080" cy="4846320"/>
+          </a:xfrm>
+          <a:prstGeom prst="roundRect">
+            <a:avLst/>
+          </a:prstGeom>
+          <a:solidFill>
+            <a:srgbClr val="F4F8F5"/>
+          </a:solidFill>
+          <a:ln w="19050">
+            <a:solidFill>
+              <a:srgbClr val="76927A"/>
+            </a:solidFill>
+          </a:ln>
+        </p:spPr>
+        <p:style>
+          <a:lnRef idx="1">
+            <a:schemeClr val="accent1"/>
+          </a:lnRef>
+          <a:fillRef idx="3">
+            <a:schemeClr val="accent1"/>
+          </a:fillRef>
+          <a:effectRef idx="2">
+            <a:schemeClr val="accent1"/>
+          </a:effectRef>
+          <a:fontRef idx="minor">
+            <a:schemeClr val="lt1"/>
+          </a:fontRef>
+        </p:style>
+        <p:txBody>
+          <a:bodyPr wrap="square" lIns="274320" tIns="274320" rIns="274320" rtlCol="0" anchor="ctr"/>
+          <a:lstStyle/>
+          <a:p>
+            <a:pPr algn="ctr">
+              <a:spcAft>
+                <a:spcPts val="800"/>
+              </a:spcAft>
+              <a:defRPr sz="1600" b="1">
+                <a:solidFill>
+                  <a:srgbClr val="113927"/>
+                </a:solidFill>
+                <a:latin typeface="Outfit"/>
+              </a:defRPr>
+            </a:pPr>
+            <a:r>
+              <a:t>📋 Garantía Juvenil y Principios de la UE (§5.1)</a:t>
+            </a:r>
+          </a:p>
+          <a:p>
+            <a:pPr>
+              <a:spcAft>
+                <a:spcPts val="1200"/>
+              </a:spcAft>
+              <a:defRPr sz="1500">
+                <a:solidFill>
+                  <a:srgbClr val="2F3A30"/>
+                </a:solidFill>
+                <a:latin typeface="Calibri"/>
+              </a:defRPr>
+            </a:pPr>
+            <a:r>
+              <a:t>• El Sistema Nacional de Garantía Juvenil (SNGJ): Compromiso europeo de ofrecer una oportunidad de empleo, formación o prácticas en un plazo máximo de 4 meses tras terminar estudios o quedar desempleado.</a:t>
+            </a:r>
+          </a:p>
+          <a:p>
+            <a:pPr>
+              <a:spcAft>
+                <a:spcPts val="1200"/>
+              </a:spcAft>
+              <a:defRPr sz="1500">
+                <a:solidFill>
+                  <a:srgbClr val="2F3A30"/>
+                </a:solidFill>
+                <a:latin typeface="Calibri"/>
+              </a:defRPr>
+            </a:pPr>
+            <a:r>
+              <a:t>• El Principio de Adicionalidad: Bruselas prohíbe financiar gastos corrientes rutinarios de las empresas; el incentivo debe ser estrictamente complementario para generar valor neto.</a:t>
+            </a:r>
+          </a:p>
+          <a:p>
+            <a:pPr>
+              <a:defRPr sz="1500" b="1">
+                <a:solidFill>
+                  <a:srgbClr val="E98F71"/>
+                </a:solidFill>
+                <a:latin typeface="Calibri"/>
+              </a:defRPr>
+            </a:pPr>
+            <a:r>
+              <a:t>• El cuello de botella de absorción: La rigidez administrativa provoca a menudo un 'gasto apresurado' a cierre de convocatoria para no devolver fondos.</a:t>
+            </a:r>
+          </a:p>
+        </p:txBody>
+      </p:sp>
+    </p:spTree>
+  </p:cSld>
+  <p:clrMapOvr>
+    <a:masterClrMapping/>
+  </p:clrMapOvr>
+</p:sld>
+</file>
+
+<file path=ppt/slides/slide14.xml><?xml version="1.0" encoding="utf-8"?>
+<p:sld xmlns:a="http://schemas.openxmlformats.org/drawingml/2006/main" xmlns:r="http://schemas.openxmlformats.org/officeDocument/2006/relationships" xmlns:p="http://schemas.openxmlformats.org/presentationml/2006/main">
+  <p:cSld>
+    <p:spTree>
+      <p:nvGrpSpPr>
+        <p:cNvPr id="1" name=""/>
+        <p:cNvGrpSpPr/>
+        <p:nvPr/>
+      </p:nvGrpSpPr>
+      <p:grpSpPr>
+        <a:xfrm>
+          <a:off x="0" y="0"/>
+          <a:ext cx="0" cy="0"/>
+          <a:chOff x="0" y="0"/>
+          <a:chExt cx="0" cy="0"/>
+        </a:xfrm>
+      </p:grpSpPr>
+      <p:sp>
+        <p:nvSpPr>
+          <p:cNvPr id="2" name="TextBox 1"/>
+          <p:cNvSpPr txBox="1"/>
+          <p:nvPr/>
+        </p:nvSpPr>
+        <p:spPr>
+          <a:xfrm>
+            <a:off x="731520" y="365760"/>
+            <a:ext cx="9144000" cy="320040"/>
+          </a:xfrm>
+          <a:prstGeom prst="rect">
+            <a:avLst/>
+          </a:prstGeom>
+          <a:noFill/>
+        </p:spPr>
+        <p:txBody>
+          <a:bodyPr wrap="square" lIns="0" tIns="0" rIns="0" bIns="0">
+            <a:spAutoFit/>
+          </a:bodyPr>
+          <a:lstStyle/>
+          <a:p>
+            <a:pPr>
+              <a:defRPr sz="1100" b="1">
+                <a:solidFill>
+                  <a:srgbClr val="76927A"/>
+                </a:solidFill>
+                <a:latin typeface="Outfit"/>
+              </a:defRPr>
+            </a:pPr>
+            <a:r>
+              <a:t>FASE 4 · TALLER PRÁCTICO GUIADO (75–95 MIN)</a:t>
+            </a:r>
+          </a:p>
+        </p:txBody>
+      </p:sp>
+      <p:sp>
+        <p:nvSpPr>
+          <p:cNvPr id="3" name="TextBox 2"/>
+          <p:cNvSpPr txBox="1"/>
+          <p:nvPr/>
+        </p:nvSpPr>
+        <p:spPr>
+          <a:xfrm>
+            <a:off x="731520" y="658368"/>
+            <a:ext cx="9601200" cy="502920"/>
+          </a:xfrm>
+          <a:prstGeom prst="rect">
+            <a:avLst/>
+          </a:prstGeom>
+          <a:noFill/>
+        </p:spPr>
+        <p:txBody>
+          <a:bodyPr wrap="square" lIns="0" tIns="0" rIns="0" bIns="0">
+            <a:spAutoFit/>
+          </a:bodyPr>
+          <a:lstStyle/>
+          <a:p>
+            <a:pPr>
+              <a:defRPr sz="2400" b="1">
+                <a:solidFill>
+                  <a:srgbClr val="113927"/>
+                </a:solidFill>
+                <a:latin typeface="Outfit"/>
+              </a:defRPr>
+            </a:pPr>
+            <a:r>
+              <a:t>Mini-Caso Guiado de Pizarra: Auditoría de un Plan de Contratación</a:t>
+            </a:r>
+          </a:p>
+        </p:txBody>
+      </p:sp>
+      <p:pic>
+        <p:nvPicPr>
+          <p:cNvPr id="4" name="Picture 3" descr="image.png"/>
+          <p:cNvPicPr>
+            <a:picLocks noChangeAspect="1"/>
+          </p:cNvPicPr>
+          <p:nvPr/>
+        </p:nvPicPr>
+        <p:blipFill>
+          <a:blip r:embed="rId2"/>
+          <a:stretch>
+            <a:fillRect/>
+          </a:stretch>
+        </p:blipFill>
+        <p:spPr>
+          <a:xfrm>
+            <a:off x="10515600" y="411480"/>
+            <a:ext cx="926287" cy="292608"/>
+          </a:xfrm>
+          <a:prstGeom prst="rect">
+            <a:avLst/>
+          </a:prstGeom>
+        </p:spPr>
+      </p:pic>
+      <p:sp>
+        <p:nvSpPr>
+          <p:cNvPr id="5" name="Rounded Rectangle 4"/>
+          <p:cNvSpPr/>
+          <p:nvPr/>
+        </p:nvSpPr>
+        <p:spPr>
+          <a:xfrm>
+            <a:off x="731520" y="1371600"/>
+            <a:ext cx="5212080" cy="4846320"/>
+          </a:xfrm>
+          <a:prstGeom prst="roundRect">
+            <a:avLst/>
+          </a:prstGeom>
+          <a:solidFill>
+            <a:srgbClr val="F4F8F5"/>
+          </a:solidFill>
+          <a:ln w="19050">
+            <a:solidFill>
+              <a:srgbClr val="113927"/>
+            </a:solidFill>
+          </a:ln>
+        </p:spPr>
+        <p:style>
+          <a:lnRef idx="1">
+            <a:schemeClr val="accent1"/>
+          </a:lnRef>
+          <a:fillRef idx="3">
+            <a:schemeClr val="accent1"/>
+          </a:fillRef>
+          <a:effectRef idx="2">
+            <a:schemeClr val="accent1"/>
+          </a:effectRef>
+          <a:fontRef idx="minor">
+            <a:schemeClr val="lt1"/>
+          </a:fontRef>
+        </p:style>
+        <p:txBody>
+          <a:bodyPr wrap="square" lIns="274320" tIns="274320" rIns="274320" rtlCol="0" anchor="ctr"/>
+          <a:lstStyle/>
+          <a:p>
+            <a:pPr algn="ctr">
+              <a:spcAft>
+                <a:spcPts val="800"/>
+              </a:spcAft>
+              <a:defRPr sz="1600" b="1">
+                <a:solidFill>
+                  <a:srgbClr val="113927"/>
+                </a:solidFill>
+                <a:latin typeface="Outfit"/>
+              </a:defRPr>
+            </a:pPr>
+            <a:r>
+              <a:t>📝 Enunciado del Caso (Resolución en Directo)</a:t>
+            </a:r>
+          </a:p>
+          <a:p>
+            <a:pPr>
+              <a:spcAft>
+                <a:spcPts val="1200"/>
+              </a:spcAft>
+              <a:defRPr sz="1500">
+                <a:solidFill>
+                  <a:srgbClr val="2F3A30"/>
+                </a:solidFill>
+                <a:latin typeface="Calibri"/>
+              </a:defRPr>
+            </a:pPr>
+            <a:r>
+              <a:t>Una comunidad autónoma aprueba el 'Plan Impulsa Pyme' con 16 Millones de Euros (16 M€).</a:t>
+            </a:r>
+            <a:br/>
+            <a:br/>
+            <a:r>
+              <a:t>• Otorga 8.000 € a fondo perdido por cada contrato indefinido formalizado con desempleados sénior.</a:t>
+            </a:r>
+            <a:br/>
+            <a:r>
+              <a:t>• Se agota el presupuesto formalizando 2.000 contratos subvencionados (S = 2.000).</a:t>
+            </a:r>
+          </a:p>
+          <a:p>
+            <a:pPr>
+              <a:defRPr sz="1500" b="1">
+                <a:solidFill>
+                  <a:srgbClr val="E98F71"/>
+                </a:solidFill>
+                <a:latin typeface="Calibri"/>
+              </a:defRPr>
+            </a:pPr>
+            <a:r>
+              <a:t>Datos de auditoría ex-post:</a:t>
+            </a:r>
+            <a:br/>
+            <a:r>
+              <a:t>• Tasa de Peso Muerto (pm): 60%</a:t>
+            </a:r>
+            <a:br/>
+            <a:r>
+              <a:t>• Tasa de Sustitución (s): 15%</a:t>
+            </a:r>
+            <a:br/>
+            <a:r>
+              <a:t>• Tasa de Desplazamiento (d): 5%</a:t>
+            </a:r>
+            <a:br/>
+            <a:br/>
+            <a:r>
+              <a:t>👉 Preguntas: ¿Cuántos empleos netos se han creado? ¿Cuál es el coste efectivo por cada empleo adicional?</a:t>
+            </a:r>
+          </a:p>
+        </p:txBody>
+      </p:sp>
+      <mc:AlternateContent xmlns:mc="http://schemas.openxmlformats.org/markup-compatibility/2006">
+        <mc:Choice xmlns:a14="http://schemas.microsoft.com/office/drawing/2010/main" Requires="a14">
+          <p:sp>
+            <p:nvSpPr>
+              <p:cNvPr id="6" name="Rounded Rectangle 5"/>
+              <p:cNvSpPr/>
+              <p:nvPr/>
+            </p:nvSpPr>
+            <p:spPr>
+              <a:xfrm>
+                <a:off x="6217920" y="1371600"/>
+                <a:ext cx="5212080" cy="4846320"/>
+              </a:xfrm>
+              <a:prstGeom prst="roundRect">
+                <a:avLst/>
+              </a:prstGeom>
+              <a:solidFill>
+                <a:srgbClr val="113927"/>
+              </a:solidFill>
+              <a:ln>
+                <a:solidFill>
+                  <a:srgbClr val="113927"/>
+                </a:solidFill>
+              </a:ln>
+            </p:spPr>
+            <p:style>
+              <a:lnRef idx="1">
+                <a:schemeClr val="accent1"/>
+              </a:lnRef>
+              <a:fillRef idx="3">
+                <a:schemeClr val="accent1"/>
+              </a:fillRef>
+              <a:effectRef idx="2">
+                <a:schemeClr val="accent1"/>
+              </a:effectRef>
+              <a:fontRef idx="minor">
+                <a:schemeClr val="lt1"/>
+              </a:fontRef>
+            </p:style>
+            <p:txBody>
+              <a:bodyPr wrap="square" lIns="274320" tIns="274320" rIns="274320" rtlCol="0" anchor="ctr"/>
+              <a:lstStyle/>
+              <a:p>
+                <a:pPr algn="ctr">
+                  <a:spcAft>
+                    <a:spcPts val="800"/>
+                  </a:spcAft>
+                  <a:defRPr sz="1600" b="1">
+                    <a:solidFill>
+                      <a:srgbClr val="EDB090"/>
+                    </a:solidFill>
+                    <a:latin typeface="Outfit"/>
+                  </a:defRPr>
+                </a:pPr>
+                <a:r>
+                  <a:rPr dirty="0"/>
+                  <a:t>🧮 </a:t>
+                </a:r>
+                <a:r>
+                  <a:rPr dirty="0" err="1"/>
+                  <a:t>Resolución</a:t>
+                </a:r>
+                <a:r>
+                  <a:rPr dirty="0"/>
+                  <a:t> Paso a Paso </a:t>
+                </a:r>
+                <a:r>
+                  <a:rPr dirty="0" err="1"/>
+                  <a:t>en</a:t>
+                </a:r>
+                <a:r>
+                  <a:rPr dirty="0"/>
+                  <a:t> </a:t>
+                </a:r>
+                <a:r>
+                  <a:rPr dirty="0" err="1"/>
+                  <a:t>Pizarra</a:t>
+                </a:r>
+                <a:endParaRPr dirty="0"/>
+              </a:p>
+              <a:p>
+                <a:pPr>
+                  <a:spcAft>
+                    <a:spcPts val="1000"/>
+                  </a:spcAft>
+                  <a:defRPr sz="1400" b="1">
+                    <a:solidFill>
+                      <a:srgbClr val="FFFFFF"/>
+                    </a:solidFill>
+                    <a:latin typeface="Calibri"/>
+                  </a:defRPr>
+                </a:pPr>
+                <a:r>
+                  <a:rPr dirty="0"/>
+                  <a:t>1. Tasa de </a:t>
+                </a:r>
+                <a:r>
+                  <a:rPr dirty="0" err="1"/>
+                  <a:t>Pérdida</a:t>
+                </a:r>
+                <a:r>
+                  <a:rPr dirty="0"/>
+                  <a:t> Total:</a:t>
+                </a:r>
+                <a:br>
+                  <a:rPr dirty="0"/>
+                </a:br>
+                <a:r>
+                  <a:rPr dirty="0"/>
+                  <a:t>   </a:t>
+                </a:r>
+                <a:r>
+                  <a:rPr dirty="0" err="1"/>
+                  <a:t>Pérdida</a:t>
+                </a:r>
+                <a:r>
+                  <a:rPr dirty="0"/>
+                  <a:t> = pm + s + d = 0,60 + 0,15 + 0,05 = 0,80 (80%)</a:t>
+                </a:r>
+                <a:br>
+                  <a:rPr dirty="0"/>
+                </a:br>
+                <a:br>
+                  <a:rPr dirty="0"/>
+                </a:br>
+                <a:r>
+                  <a:rPr dirty="0"/>
+                  <a:t>2. Tasa de </a:t>
+                </a:r>
+                <a:r>
+                  <a:rPr dirty="0" err="1"/>
+                  <a:t>Éxito</a:t>
+                </a:r>
+                <a:r>
+                  <a:rPr dirty="0"/>
+                  <a:t> Neto </a:t>
+                </a:r>
+                <a:r>
+                  <a:rPr dirty="0" err="1"/>
+                  <a:t>Efectivo</a:t>
+                </a:r>
+                <a:r>
+                  <a:rPr dirty="0"/>
+                  <a:t>:</a:t>
+                </a:r>
+                <a:br>
+                  <a:rPr dirty="0"/>
+                </a:br>
+                <a:r>
+                  <a:rPr dirty="0"/>
+                  <a:t>   Tasa Neta = 1 − 0,80 = 0,20 (20%)</a:t>
+                </a:r>
+                <a:br>
+                  <a:rPr dirty="0"/>
+                </a:br>
+                <a:br>
+                  <a:rPr dirty="0"/>
+                </a:br>
+                <a:r>
+                  <a:rPr dirty="0"/>
+                  <a:t>3. Empleo Neto Real </a:t>
+                </a:r>
+                <a:r>
+                  <a:rPr dirty="0" err="1"/>
+                  <a:t>Creado</a:t>
+                </a:r>
+                <a:r>
+                  <a:rPr dirty="0"/>
+                  <a:t> (</a:t>
+                </a:r>
+                <a14:m>
+                  <m:oMath xmlns:m="http://schemas.openxmlformats.org/officeDocument/2006/math">
+                    <m:r>
+                      <m:rPr>
+                        <m:sty m:val="p"/>
+                      </m:rPr>
+                      <a:rPr lang="el-GR" i="0" dirty="0" smtClean="0">
+                        <a:latin typeface="Cambria Math" panose="02040503050406030204" pitchFamily="18" charset="0"/>
+                      </a:rPr>
+                      <m:t>Δ</m:t>
+                    </m:r>
+                    <m:sSub>
+                      <m:sSubPr>
+                        <m:ctrlPr>
+                          <a:rPr lang="el-GR" i="1" dirty="0" err="1">
+                            <a:latin typeface="Cambria Math" panose="02040503050406030204" pitchFamily="18" charset="0"/>
+                          </a:rPr>
+                        </m:ctrlPr>
+                      </m:sSubPr>
+                      <m:e>
+                        <m:r>
+                          <a:rPr lang="el-GR" i="1" dirty="0" err="1">
+                            <a:latin typeface="Cambria Math" panose="02040503050406030204" pitchFamily="18" charset="0"/>
+                          </a:rPr>
+                          <m:t>𝑁</m:t>
+                        </m:r>
+                      </m:e>
+                      <m:sub>
+                        <m:r>
+                          <a:rPr lang="el-GR" i="1" dirty="0" err="1">
+                            <a:latin typeface="Cambria Math" panose="02040503050406030204" pitchFamily="18" charset="0"/>
+                          </a:rPr>
+                          <m:t>𝑛𝑒𝑡𝑜</m:t>
+                        </m:r>
+                      </m:sub>
+                    </m:sSub>
+                  </m:oMath>
+                </a14:m>
+                <a:r>
+                  <a:rPr dirty="0"/>
+                  <a:t>):</a:t>
+                </a:r>
+                <a:br>
+                  <a:rPr dirty="0"/>
+                </a:br>
+                <a:r>
+                  <a:rPr dirty="0"/>
+                  <a:t>   </a:t>
+                </a:r>
+                <a14:m>
+                  <m:oMath xmlns:m="http://schemas.openxmlformats.org/officeDocument/2006/math">
+                    <m:r>
+                      <m:rPr>
+                        <m:sty m:val="p"/>
+                      </m:rPr>
+                      <a:rPr lang="el-GR" i="0" dirty="0" smtClean="0">
+                        <a:latin typeface="Cambria Math" panose="02040503050406030204" pitchFamily="18" charset="0"/>
+                      </a:rPr>
+                      <m:t>Δ</m:t>
+                    </m:r>
+                    <m:sSub>
+                      <m:sSubPr>
+                        <m:ctrlPr>
+                          <a:rPr lang="el-GR" i="1" dirty="0" err="1">
+                            <a:latin typeface="Cambria Math" panose="02040503050406030204" pitchFamily="18" charset="0"/>
+                          </a:rPr>
+                        </m:ctrlPr>
+                      </m:sSubPr>
+                      <m:e>
+                        <m:r>
+                          <a:rPr lang="el-GR" i="1" dirty="0" err="1">
+                            <a:latin typeface="Cambria Math" panose="02040503050406030204" pitchFamily="18" charset="0"/>
+                          </a:rPr>
+                          <m:t>𝑁</m:t>
+                        </m:r>
+                      </m:e>
+                      <m:sub>
+                        <m:r>
+                          <a:rPr lang="el-GR" i="1" dirty="0" err="1">
+                            <a:latin typeface="Cambria Math" panose="02040503050406030204" pitchFamily="18" charset="0"/>
+                          </a:rPr>
+                          <m:t>𝑛𝑒𝑡𝑜</m:t>
+                        </m:r>
+                      </m:sub>
+                    </m:sSub>
+                  </m:oMath>
+                </a14:m>
+                <a:r>
+                  <a:rPr dirty="0"/>
+                  <a:t> = 2.000 · 0,20 = 400 </a:t>
+                </a:r>
+                <a:r>
+                  <a:rPr dirty="0" err="1"/>
+                  <a:t>empleos</a:t>
+                </a:r>
+                <a:r>
+                  <a:rPr dirty="0"/>
+                  <a:t> </a:t>
+                </a:r>
+                <a:r>
+                  <a:rPr dirty="0" err="1"/>
+                  <a:t>netos</a:t>
+                </a:r>
+                <a:br>
+                  <a:rPr dirty="0"/>
+                </a:br>
+                <a:r>
+                  <a:rPr dirty="0"/>
+                  <a:t>   (1.600 </a:t>
+                </a:r>
+                <a:r>
+                  <a:rPr dirty="0" err="1"/>
+                  <a:t>contratos</a:t>
+                </a:r>
+                <a:r>
+                  <a:rPr dirty="0"/>
+                  <a:t> no </a:t>
+                </a:r>
+                <a:r>
+                  <a:rPr dirty="0" err="1"/>
+                  <a:t>crearon</a:t>
+                </a:r>
+                <a:r>
+                  <a:rPr dirty="0"/>
+                  <a:t> </a:t>
+                </a:r>
+                <a:r>
+                  <a:rPr dirty="0" err="1"/>
+                  <a:t>ningún</a:t>
+                </a:r>
+                <a:r>
+                  <a:rPr dirty="0"/>
+                  <a:t> </a:t>
+                </a:r>
+                <a:r>
+                  <a:rPr dirty="0" err="1"/>
+                  <a:t>empleo</a:t>
+                </a:r>
+                <a:r>
+                  <a:rPr dirty="0"/>
+                  <a:t> </a:t>
+                </a:r>
+                <a:r>
+                  <a:rPr dirty="0" err="1"/>
+                  <a:t>adicional</a:t>
+                </a:r>
+                <a:r>
+                  <a:rPr dirty="0"/>
+                  <a:t>)</a:t>
+                </a:r>
+                <a:br>
+                  <a:rPr dirty="0"/>
+                </a:br>
+                <a:br>
+                  <a:rPr dirty="0"/>
+                </a:br>
+                <a:r>
+                  <a:rPr dirty="0"/>
+                  <a:t>4. Coste Fiscal </a:t>
+                </a:r>
+                <a:r>
+                  <a:rPr dirty="0" err="1"/>
+                  <a:t>Efectivo</a:t>
+                </a:r>
+                <a:r>
+                  <a:rPr dirty="0"/>
+                  <a:t> </a:t>
+                </a:r>
+                <a:r>
+                  <a:rPr dirty="0" err="1"/>
+                  <a:t>por</a:t>
+                </a:r>
+                <a:r>
+                  <a:rPr dirty="0"/>
+                  <a:t> Empleo Neto:</a:t>
+                </a:r>
+                <a:br>
+                  <a:rPr dirty="0"/>
+                </a:br>
+                <a:r>
+                  <a:rPr dirty="0"/>
+                  <a:t>   Coste = 16.000.000 € / 400 = 40.000 € </a:t>
+                </a:r>
+                <a:r>
+                  <a:rPr dirty="0" err="1"/>
+                  <a:t>por</a:t>
+                </a:r>
+                <a:r>
+                  <a:rPr dirty="0"/>
+                  <a:t> </a:t>
+                </a:r>
+                <a:r>
+                  <a:rPr dirty="0" err="1"/>
+                  <a:t>empleo</a:t>
+                </a:r>
+                <a:br>
+                  <a:rPr dirty="0"/>
+                </a:br>
+                <a:r>
+                  <a:rPr dirty="0"/>
+                  <a:t>   (O bien: 8.000 € · [1 / 0,20] = 8.000 · 5 = 40.000 €)</a:t>
+                </a:r>
+              </a:p>
+              <a:p>
+                <a:pPr>
+                  <a:defRPr sz="1400" b="1">
+                    <a:solidFill>
+                      <a:srgbClr val="E98F71"/>
+                    </a:solidFill>
+                    <a:latin typeface="Calibri"/>
+                  </a:defRPr>
+                </a:pPr>
+                <a:r>
+                  <a:rPr dirty="0"/>
+                  <a:t>¡El </a:t>
+                </a:r>
+                <a:r>
+                  <a:rPr dirty="0" err="1"/>
+                  <a:t>coste</a:t>
+                </a:r>
+                <a:r>
+                  <a:rPr dirty="0"/>
+                  <a:t> real </a:t>
+                </a:r>
+                <a:r>
+                  <a:rPr dirty="0" err="1"/>
+                  <a:t>quintuplica</a:t>
+                </a:r>
+                <a:r>
+                  <a:rPr dirty="0"/>
+                  <a:t> la </a:t>
+                </a:r>
+                <a:r>
+                  <a:rPr dirty="0" err="1"/>
+                  <a:t>ayuda</a:t>
+                </a:r>
+                <a:r>
+                  <a:rPr dirty="0"/>
+                  <a:t> nominal </a:t>
+                </a:r>
+                <a:r>
+                  <a:rPr dirty="0" err="1"/>
+                  <a:t>por</a:t>
+                </a:r>
+                <a:r>
+                  <a:rPr dirty="0"/>
+                  <a:t> culpa del 80% de </a:t>
+                </a:r>
+                <a:r>
+                  <a:rPr dirty="0" err="1"/>
+                  <a:t>ineficiencia</a:t>
+                </a:r>
+                <a:r>
+                  <a:rPr dirty="0"/>
+                  <a:t>!</a:t>
+                </a:r>
+              </a:p>
+            </p:txBody>
+          </p:sp>
+        </mc:Choice>
+        <mc:Fallback>
+          <p:sp>
+            <p:nvSpPr>
+              <p:cNvPr id="6" name="Rounded Rectangle 5"/>
+              <p:cNvSpPr>
+                <a:spLocks noRot="1" noChangeAspect="1" noMove="1" noResize="1" noEditPoints="1" noAdjustHandles="1" noChangeArrowheads="1" noChangeShapeType="1" noTextEdit="1"/>
+              </p:cNvSpPr>
+              <p:nvPr/>
+            </p:nvSpPr>
+            <p:spPr>
+              <a:xfrm>
+                <a:off x="6217920" y="1371600"/>
+                <a:ext cx="5212080" cy="4846320"/>
+              </a:xfrm>
+              <a:prstGeom prst="roundRect">
+                <a:avLst/>
+              </a:prstGeom>
+              <a:blipFill>
+                <a:blip r:embed="rId3"/>
+                <a:stretch>
+                  <a:fillRect/>
+                </a:stretch>
+              </a:blipFill>
+              <a:ln>
+                <a:solidFill>
+                  <a:srgbClr val="113927"/>
+                </a:solidFill>
+              </a:ln>
+            </p:spPr>
+            <p:txBody>
+              <a:bodyPr/>
+              <a:lstStyle/>
+              <a:p>
+                <a:r>
+                  <a:rPr lang="es-ES">
+                    <a:noFill/>
+                  </a:rPr>
+                  <a:t> </a:t>
+                </a:r>
+              </a:p>
+            </p:txBody>
+          </p:sp>
+        </mc:Fallback>
+      </mc:AlternateContent>
+    </p:spTree>
+  </p:cSld>
+  <p:clrMapOvr>
+    <a:masterClrMapping/>
+  </p:clrMapOvr>
+</p:sld>
+</file>
+
+<file path=ppt/slides/slide15.xml><?xml version="1.0" encoding="utf-8"?>
+<p:sld xmlns:a="http://schemas.openxmlformats.org/drawingml/2006/main" xmlns:r="http://schemas.openxmlformats.org/officeDocument/2006/relationships" xmlns:p="http://schemas.openxmlformats.org/presentationml/2006/main">
+  <p:cSld>
+    <p:spTree>
+      <p:nvGrpSpPr>
+        <p:cNvPr id="1" name=""/>
+        <p:cNvGrpSpPr/>
+        <p:nvPr/>
+      </p:nvGrpSpPr>
+      <p:grpSpPr>
+        <a:xfrm>
+          <a:off x="0" y="0"/>
+          <a:ext cx="0" cy="0"/>
+          <a:chOff x="0" y="0"/>
+          <a:chExt cx="0" cy="0"/>
+        </a:xfrm>
+      </p:grpSpPr>
+      <p:sp>
+        <p:nvSpPr>
+          <p:cNvPr id="2" name="TextBox 1"/>
+          <p:cNvSpPr txBox="1"/>
+          <p:nvPr/>
+        </p:nvSpPr>
+        <p:spPr>
+          <a:xfrm>
+            <a:off x="731520" y="365760"/>
+            <a:ext cx="9144000" cy="320040"/>
+          </a:xfrm>
+          <a:prstGeom prst="rect">
+            <a:avLst/>
+          </a:prstGeom>
+          <a:noFill/>
+        </p:spPr>
+        <p:txBody>
+          <a:bodyPr wrap="square" lIns="0" tIns="0" rIns="0" bIns="0">
+            <a:spAutoFit/>
+          </a:bodyPr>
+          <a:lstStyle/>
+          <a:p>
+            <a:pPr>
+              <a:defRPr sz="1100" b="1">
+                <a:solidFill>
+                  <a:srgbClr val="76927A"/>
+                </a:solidFill>
+                <a:latin typeface="Outfit"/>
+              </a:defRPr>
+            </a:pPr>
+            <a:r>
+              <a:t>FASE 5 · RETO MANUSCRITO INDIVIDUAL EN PAPEL (95–120 MIN)</a:t>
+            </a:r>
+          </a:p>
+        </p:txBody>
+      </p:sp>
+      <p:sp>
+        <p:nvSpPr>
+          <p:cNvPr id="3" name="TextBox 2"/>
+          <p:cNvSpPr txBox="1"/>
+          <p:nvPr/>
+        </p:nvSpPr>
+        <p:spPr>
+          <a:xfrm>
+            <a:off x="731520" y="658368"/>
+            <a:ext cx="9601200" cy="502920"/>
+          </a:xfrm>
+          <a:prstGeom prst="rect">
+            <a:avLst/>
+          </a:prstGeom>
+          <a:noFill/>
+        </p:spPr>
+        <p:txBody>
+          <a:bodyPr wrap="square" lIns="0" tIns="0" rIns="0" bIns="0">
+            <a:spAutoFit/>
+          </a:bodyPr>
+          <a:lstStyle/>
+          <a:p>
+            <a:pPr>
+              <a:defRPr sz="2400" b="1">
+                <a:solidFill>
+                  <a:srgbClr val="113927"/>
+                </a:solidFill>
+                <a:latin typeface="Outfit"/>
+              </a:defRPr>
+            </a:pPr>
+            <a:r>
+              <a:t>Reto de Evaluación Continua · Tiempo Estricto: 10 Minutos</a:t>
+            </a:r>
+          </a:p>
+        </p:txBody>
+      </p:sp>
+      <p:pic>
+        <p:nvPicPr>
+          <p:cNvPr id="4" name="Picture 3" descr="psll_lockup.png"/>
+          <p:cNvPicPr>
+            <a:picLocks noChangeAspect="1"/>
+          </p:cNvPicPr>
+          <p:nvPr/>
+        </p:nvPicPr>
+        <p:blipFill>
+          <a:blip r:embed="rId2"/>
+          <a:stretch>
+            <a:fillRect/>
+          </a:stretch>
+        </p:blipFill>
+        <p:spPr>
+          <a:xfrm>
+            <a:off x="10515600" y="411480"/>
+            <a:ext cx="926287" cy="292608"/>
+          </a:xfrm>
+          <a:prstGeom prst="rect">
+            <a:avLst/>
+          </a:prstGeom>
+        </p:spPr>
+      </p:pic>
+      <p:sp>
+        <p:nvSpPr>
+          <p:cNvPr id="5" name="Rounded Rectangle 4"/>
+          <p:cNvSpPr/>
+          <p:nvPr/>
+        </p:nvSpPr>
+        <p:spPr>
+          <a:xfrm>
+            <a:off x="731520" y="1037400"/>
+            <a:ext cx="7232609" cy="5668198"/>
+          </a:xfrm>
+          <a:prstGeom prst="roundRect">
+            <a:avLst/>
+          </a:prstGeom>
+          <a:solidFill>
+            <a:srgbClr val="F4F8F5"/>
+          </a:solidFill>
+          <a:ln w="25400">
+            <a:solidFill>
+              <a:srgbClr val="E98F71"/>
+            </a:solidFill>
+          </a:ln>
+        </p:spPr>
+        <p:style>
+          <a:lnRef idx="1">
+            <a:schemeClr val="accent1"/>
+          </a:lnRef>
+          <a:fillRef idx="3">
+            <a:schemeClr val="accent1"/>
+          </a:fillRef>
+          <a:effectRef idx="2">
+            <a:schemeClr val="accent1"/>
+          </a:effectRef>
+          <a:fontRef idx="minor">
+            <a:schemeClr val="lt1"/>
+          </a:fontRef>
+        </p:style>
+        <p:txBody>
+          <a:bodyPr wrap="square" lIns="365760" tIns="365760" rIns="365760" rtlCol="0" anchor="ctr"/>
+          <a:lstStyle/>
+          <a:p>
+            <a:pPr algn="ctr">
+              <a:spcAft>
+                <a:spcPts val="1000"/>
+              </a:spcAft>
+              <a:defRPr sz="1400" b="1">
+                <a:solidFill>
+                  <a:srgbClr val="E98F71"/>
+                </a:solidFill>
+                <a:latin typeface="Outfit"/>
+              </a:defRPr>
+            </a:pPr>
+            <a:r>
+              <a:t>✍️ ENTORNO CONTROLADO: PANTALLAS CERRADAS Y MÓVILES GUARDADOS · SOLO LÁPIZ Y PAPEL</a:t>
+            </a:r>
+          </a:p>
+          <a:p>
+            <a:pPr>
+              <a:spcAft>
+                <a:spcPts val="1200"/>
+              </a:spcAft>
+              <a:defRPr sz="1600">
+                <a:solidFill>
+                  <a:srgbClr val="2F3A30"/>
+                </a:solidFill>
+                <a:latin typeface="Calibri"/>
+              </a:defRPr>
+            </a:pPr>
+            <a:r>
+              <a:t>Una comunidad autónoma aprueba un plan de empleo de 30 Millones de Euros (30 M€). Concede 6.000 € a fondo perdido por cada contrato indefinido formalizado con desempleados mayores de 45 años (exigiendo 12 meses de permanencia). Se agota el presupuesto formalizando 5.000 contratos subvencionados.</a:t>
+            </a:r>
+            <a:br/>
+            <a:br/>
+            <a:r>
+              <a:t>La evaluación ex-post arroja los siguientes datos: Tasa de Peso Muerto = 65%, Tasa de Sustitución = 15%, Tasa de Desplazamiento = 5%.</a:t>
+            </a:r>
+          </a:p>
+          <a:p>
+            <a:pPr>
+              <a:defRPr sz="1600" b="1">
+                <a:solidFill>
+                  <a:srgbClr val="113927"/>
+                </a:solidFill>
+                <a:latin typeface="Calibri"/>
+              </a:defRPr>
+            </a:pPr>
+            <a:r>
+              <a:t>a) Cálculo del Empleo Neto y Eficacia Fiscal (0 – 500 pts):</a:t>
+            </a:r>
+            <a:br/>
+            <a:r>
+              <a:t>Calcula el número exacto de empleos netos reales creados (ΔN_neto) y el coste fiscal efectivo por cada empleo adicional. Compara este coste real con los 6.000 € nominales de la ayuda.</a:t>
+            </a:r>
+            <a:br/>
+            <a:br/>
+            <a:r>
+              <a:t>b) Rediseño Institucional y Salvaguardas Normativas (0 – 500 pts):</a:t>
+            </a:r>
+            <a:br/>
+            <a:r>
+              <a:t>Como economista laboral, formula y justifica DOS cláusulas técnicas de condicionalidad que el regulador público debería introducir en la orden de bases para blindar la eficacia del programa frente al peso muerto y la sustitución.</a:t>
+            </a:r>
+          </a:p>
+        </p:txBody>
+      </p:sp>
+      <p:pic>
+        <p:nvPicPr>
+          <p:cNvPr id="6" name="Imagen 5" descr="Código QR">
+            <a:extLst>
+              <a:ext uri="{FF2B5EF4-FFF2-40B4-BE49-F238E27FC236}">
+                <a16:creationId xmlns:a16="http://schemas.microsoft.com/office/drawing/2014/main" id="{7FD80CFF-3BCF-109D-5B83-1A6B63FC60CA}"/>
+              </a:ext>
+            </a:extLst>
+          </p:cNvPr>
+          <p:cNvPicPr>
+            <a:picLocks noChangeAspect="1"/>
+          </p:cNvPicPr>
+          <p:nvPr/>
+        </p:nvPicPr>
+        <p:blipFill>
+          <a:blip r:embed="rId3"/>
+          <a:stretch>
+            <a:fillRect/>
+          </a:stretch>
+        </p:blipFill>
+        <p:spPr>
+          <a:xfrm>
+            <a:off x="8245823" y="2005779"/>
+            <a:ext cx="3584941" cy="3584941"/>
+          </a:xfrm>
+          <a:prstGeom prst="rect">
+            <a:avLst/>
+          </a:prstGeom>
+        </p:spPr>
+      </p:pic>
+    </p:spTree>
+  </p:cSld>
+  <p:clrMapOvr>
+    <a:masterClrMapping/>
+  </p:clrMapOvr>
+</p:sld>
+</file>
+
+<file path=ppt/slides/slide16.xml><?xml version="1.0" encoding="utf-8"?>
+<p:sld xmlns:a="http://schemas.openxmlformats.org/drawingml/2006/main" xmlns:r="http://schemas.openxmlformats.org/officeDocument/2006/relationships" xmlns:p="http://schemas.openxmlformats.org/presentationml/2006/main">
+  <p:cSld>
+    <p:spTree>
+      <p:nvGrpSpPr>
+        <p:cNvPr id="1" name=""/>
+        <p:cNvGrpSpPr/>
+        <p:nvPr/>
+      </p:nvGrpSpPr>
+      <p:grpSpPr>
+        <a:xfrm>
+          <a:off x="0" y="0"/>
+          <a:ext cx="0" cy="0"/>
+          <a:chOff x="0" y="0"/>
+          <a:chExt cx="0" cy="0"/>
+        </a:xfrm>
+      </p:grpSpPr>
+      <p:sp>
+        <p:nvSpPr>
+          <p:cNvPr id="2" name="TextBox 1"/>
+          <p:cNvSpPr txBox="1"/>
+          <p:nvPr/>
+        </p:nvSpPr>
+        <p:spPr>
+          <a:xfrm>
+            <a:off x="731520" y="365760"/>
+            <a:ext cx="9144000" cy="320040"/>
+          </a:xfrm>
+          <a:prstGeom prst="rect">
+            <a:avLst/>
+          </a:prstGeom>
+          <a:noFill/>
+        </p:spPr>
+        <p:txBody>
+          <a:bodyPr wrap="square" lIns="0" tIns="0" rIns="0" bIns="0">
+            <a:spAutoFit/>
+          </a:bodyPr>
+          <a:lstStyle/>
+          <a:p>
+            <a:pPr>
+              <a:defRPr sz="1100" b="1">
+                <a:solidFill>
+                  <a:srgbClr val="76927A"/>
+                </a:solidFill>
+                <a:latin typeface="Outfit"/>
+              </a:defRPr>
+            </a:pPr>
+            <a:r>
+              <a:t>FASE 4 · TALLER ACTIVO Y LANZADERA INMEDIATA (75–95 MIN)</a:t>
+            </a:r>
+          </a:p>
+        </p:txBody>
+      </p:sp>
+      <p:sp>
+        <p:nvSpPr>
+          <p:cNvPr id="3" name="TextBox 2"/>
+          <p:cNvSpPr txBox="1"/>
+          <p:nvPr/>
+        </p:nvSpPr>
+        <p:spPr>
+          <a:xfrm>
+            <a:off x="731520" y="658368"/>
+            <a:ext cx="9601200" cy="502920"/>
+          </a:xfrm>
+          <a:prstGeom prst="rect">
+            <a:avLst/>
+          </a:prstGeom>
+          <a:noFill/>
+        </p:spPr>
+        <p:txBody>
+          <a:bodyPr wrap="square" lIns="0" tIns="0" rIns="0" bIns="0">
+            <a:spAutoFit/>
+          </a:bodyPr>
+          <a:lstStyle/>
+          <a:p>
+            <a:pPr>
+              <a:defRPr sz="2400" b="1">
+                <a:solidFill>
+                  <a:srgbClr val="113927"/>
+                </a:solidFill>
+                <a:latin typeface="Outfit"/>
+              </a:defRPr>
+            </a:pPr>
+            <a:r>
+              <a:t>Al Terminar esta Sesión: Arranque de la EPD 1 en Informática</a:t>
+            </a:r>
+          </a:p>
+        </p:txBody>
+      </p:sp>
+      <p:pic>
+        <p:nvPicPr>
+          <p:cNvPr id="4" name="Picture 3" descr="psll_lockup.png"/>
+          <p:cNvPicPr>
+            <a:picLocks noChangeAspect="1"/>
+          </p:cNvPicPr>
+          <p:nvPr/>
+        </p:nvPicPr>
+        <p:blipFill>
+          <a:blip r:embed="rId2"/>
+          <a:stretch>
+            <a:fillRect/>
+          </a:stretch>
+        </p:blipFill>
+        <p:spPr>
+          <a:xfrm>
+            <a:off x="10515600" y="411480"/>
+            <a:ext cx="926287" cy="292608"/>
+          </a:xfrm>
+          <a:prstGeom prst="rect">
+            <a:avLst/>
+          </a:prstGeom>
+        </p:spPr>
+      </p:pic>
+      <p:sp>
+        <p:nvSpPr>
+          <p:cNvPr id="5" name="Rounded Rectangle 4"/>
+          <p:cNvSpPr/>
+          <p:nvPr/>
+        </p:nvSpPr>
+        <p:spPr>
+          <a:xfrm>
+            <a:off x="731520" y="1371600"/>
             <a:ext cx="6858000" cy="4846320"/>
           </a:xfrm>
           <a:prstGeom prst="roundRect">
@@ -4360,1323 +6046,6 @@
             <a:r>
               <a:rPr dirty="0"/>
               <a:t>https://mhidper.github.io/micro_apps/epd_laboratorio.html</a:t>
-            </a:r>
-          </a:p>
-        </p:txBody>
-      </p:sp>
-    </p:spTree>
-  </p:cSld>
-  <p:clrMapOvr>
-    <a:masterClrMapping/>
-  </p:clrMapOvr>
-</p:sld>
-</file>
-
-<file path=ppt/slides/slide13.xml><?xml version="1.0" encoding="utf-8"?>
-<p:sld xmlns:a="http://schemas.openxmlformats.org/drawingml/2006/main" xmlns:p="http://schemas.openxmlformats.org/presentationml/2006/main" xmlns:r="http://schemas.openxmlformats.org/officeDocument/2006/relationships">
-  <p:cSld>
-    <p:spTree>
-      <p:nvGrpSpPr>
-        <p:cNvPr id="1" name=""/>
-        <p:cNvGrpSpPr/>
-        <p:nvPr/>
-      </p:nvGrpSpPr>
-      <p:grpSpPr/>
-      <p:sp>
-        <p:nvSpPr>
-          <p:cNvPr id="2" name="TextBox 1"/>
-          <p:cNvSpPr txBox="1"/>
-          <p:nvPr/>
-        </p:nvSpPr>
-        <p:spPr>
-          <a:xfrm>
-            <a:off x="731520" y="365760"/>
-            <a:ext cx="9144000" cy="320040"/>
-          </a:xfrm>
-          <a:prstGeom prst="rect">
-            <a:avLst/>
-          </a:prstGeom>
-          <a:noFill/>
-        </p:spPr>
-        <p:txBody>
-          <a:bodyPr wrap="square" lIns="0" tIns="0" rIns="0" bIns="0">
-            <a:spAutoFit/>
-          </a:bodyPr>
-          <a:lstStyle/>
-          <a:p>
-            <a:pPr>
-              <a:defRPr sz="1100" b="1">
-                <a:solidFill>
-                  <a:srgbClr val="76927A"/>
-                </a:solidFill>
-                <a:latin typeface="Outfit"/>
-              </a:defRPr>
-            </a:pPr>
-            <a:r>
-              <a:t>FASE 2 · INSTRUMENTOS Y VARIABLES DE DISEÑO (20–45 MIN)</a:t>
-            </a:r>
-          </a:p>
-        </p:txBody>
-      </p:sp>
-      <p:sp>
-        <p:nvSpPr>
-          <p:cNvPr id="3" name="TextBox 2"/>
-          <p:cNvSpPr txBox="1"/>
-          <p:nvPr/>
-        </p:nvSpPr>
-        <p:spPr>
-          <a:xfrm>
-            <a:off x="731520" y="658368"/>
-            <a:ext cx="9601200" cy="502920"/>
-          </a:xfrm>
-          <a:prstGeom prst="rect">
-            <a:avLst/>
-          </a:prstGeom>
-          <a:noFill/>
-        </p:spPr>
-        <p:txBody>
-          <a:bodyPr wrap="square" lIns="0" tIns="0" rIns="0" bIns="0">
-            <a:spAutoFit/>
-          </a:bodyPr>
-          <a:lstStyle/>
-          <a:p>
-            <a:pPr>
-              <a:defRPr sz="2400" b="1">
-                <a:solidFill>
-                  <a:srgbClr val="113927"/>
-                </a:solidFill>
-                <a:latin typeface="Outfit"/>
-              </a:defRPr>
-            </a:pPr>
-            <a:r>
-              <a:t>Las 4 Palancas Críticas de Diseño Normativo (§4.3)</a:t>
-            </a:r>
-          </a:p>
-        </p:txBody>
-      </p:sp>
-      <p:pic>
-        <p:nvPicPr>
-          <p:cNvPr id="4" name="Picture 3" descr="image.png"/>
-          <p:cNvPicPr>
-            <a:picLocks noChangeAspect="1"/>
-          </p:cNvPicPr>
-          <p:nvPr/>
-        </p:nvPicPr>
-        <p:blipFill>
-          <a:blip r:embed="rId2"/>
-          <a:stretch>
-            <a:fillRect/>
-          </a:stretch>
-        </p:blipFill>
-        <p:spPr>
-          <a:xfrm>
-            <a:off x="10515600" y="411480"/>
-            <a:ext cx="926287" cy="292608"/>
-          </a:xfrm>
-          <a:prstGeom prst="rect">
-            <a:avLst/>
-          </a:prstGeom>
-        </p:spPr>
-      </p:pic>
-      <p:sp>
-        <p:nvSpPr>
-          <p:cNvPr id="5" name="Rounded Rectangle 4"/>
-          <p:cNvSpPr/>
-          <p:nvPr/>
-        </p:nvSpPr>
-        <p:spPr>
-          <a:xfrm>
-            <a:off x="731520" y="1371600"/>
-            <a:ext cx="5212080" cy="4846320"/>
-          </a:xfrm>
-          <a:prstGeom prst="roundRect">
-            <a:avLst/>
-          </a:prstGeom>
-          <a:solidFill>
-            <a:srgbClr val="F4F8F5"/>
-          </a:solidFill>
-          <a:ln w="19050">
-            <a:solidFill>
-              <a:srgbClr val="76927A"/>
-            </a:solidFill>
-          </a:ln>
-        </p:spPr>
-        <p:style>
-          <a:lnRef idx="1">
-            <a:schemeClr val="accent1"/>
-          </a:lnRef>
-          <a:fillRef idx="3">
-            <a:schemeClr val="accent1"/>
-          </a:fillRef>
-          <a:effectRef idx="2">
-            <a:schemeClr val="accent1"/>
-          </a:effectRef>
-          <a:fontRef idx="minor">
-            <a:schemeClr val="lt1"/>
-          </a:fontRef>
-        </p:style>
-        <p:txBody>
-          <a:bodyPr rtlCol="0" anchor="ctr" wrap="square" lIns="274320" rIns="274320" tIns="274320"/>
-          <a:lstStyle/>
-          <a:p>
-            <a:pPr algn="ctr">
-              <a:spcAft>
-                <a:spcPts val="600"/>
-              </a:spcAft>
-              <a:defRPr sz="1600" b="1">
-                <a:solidFill>
-                  <a:srgbClr val="113927"/>
-                </a:solidFill>
-                <a:latin typeface="Outfit"/>
-              </a:defRPr>
-            </a:pPr>
-            <a:r>
-              <a:t>🎯 1. Colectivo Diana y Focalización</a:t>
-            </a:r>
-          </a:p>
-          <a:p>
-            <a:pPr>
-              <a:spcAft>
-                <a:spcPts val="1400"/>
-              </a:spcAft>
-              <a:defRPr sz="1500">
-                <a:solidFill>
-                  <a:srgbClr val="2F3A30"/>
-                </a:solidFill>
-                <a:latin typeface="Calibri"/>
-              </a:defRPr>
-            </a:pPr>
-            <a:r>
-              <a:t>• Universal vs. Restringido: Cuanto más general sea el incentivo, mayor es el peso muerto. Para que sea eficiente debe dirigirse estrictamente a parados de larga duración (&gt; 12 meses) o sin titulación.</a:t>
-            </a:r>
-            <a:br/>
-            <a:r>
-              <a:t>• Si se subsidia a perfiles con alta empleabilidad espontánea (ej. ingenieros junior), el peso muerto roza el 90%.</a:t>
-            </a:r>
-          </a:p>
-          <a:p>
-            <a:pPr>
-              <a:spcAft>
-                <a:spcPts val="600"/>
-              </a:spcAft>
-              <a:defRPr sz="1600" b="1">
-                <a:solidFill>
-                  <a:srgbClr val="113927"/>
-                </a:solidFill>
-                <a:latin typeface="Outfit"/>
-              </a:defRPr>
-            </a:pPr>
-            <a:r>
-              <a:t>🔄 2. La Trampa de la 'Conversión' Temporal</a:t>
-            </a:r>
-          </a:p>
-          <a:p>
-            <a:pPr>
-              <a:defRPr sz="1500">
-                <a:solidFill>
-                  <a:srgbClr val="2F3A30"/>
-                </a:solidFill>
-                <a:latin typeface="Calibri"/>
-              </a:defRPr>
-            </a:pPr>
-            <a:r>
-              <a:t>• Nueva contratación vs. Transformación a indefinido: En España se destinan cientos de millones a primar la conversión.</a:t>
-            </a:r>
-            <a:br/>
-            <a:r>
-              <a:t>• Dictamen AIReF: El peso muerto supera el 85%. La empresa ya conoce la productividad del empleado y lo iba a retener igualmente sin dinero público.</a:t>
-            </a:r>
-          </a:p>
-        </p:txBody>
-      </p:sp>
-      <p:sp>
-        <p:nvSpPr>
-          <p:cNvPr id="6" name="Rounded Rectangle 5"/>
-          <p:cNvSpPr/>
-          <p:nvPr/>
-        </p:nvSpPr>
-        <p:spPr>
-          <a:xfrm>
-            <a:off x="6217920" y="1371600"/>
-            <a:ext cx="5212080" cy="4846320"/>
-          </a:xfrm>
-          <a:prstGeom prst="roundRect">
-            <a:avLst/>
-          </a:prstGeom>
-          <a:solidFill>
-            <a:srgbClr val="F4F8F5"/>
-          </a:solidFill>
-          <a:ln w="19050">
-            <a:solidFill>
-              <a:srgbClr val="76927A"/>
-            </a:solidFill>
-          </a:ln>
-        </p:spPr>
-        <p:style>
-          <a:lnRef idx="1">
-            <a:schemeClr val="accent1"/>
-          </a:lnRef>
-          <a:fillRef idx="3">
-            <a:schemeClr val="accent1"/>
-          </a:fillRef>
-          <a:effectRef idx="2">
-            <a:schemeClr val="accent1"/>
-          </a:effectRef>
-          <a:fontRef idx="minor">
-            <a:schemeClr val="lt1"/>
-          </a:fontRef>
-        </p:style>
-        <p:txBody>
-          <a:bodyPr rtlCol="0" anchor="ctr" wrap="square" lIns="274320" rIns="274320" tIns="274320"/>
-          <a:lstStyle/>
-          <a:p>
-            <a:pPr algn="ctr">
-              <a:spcAft>
-                <a:spcPts val="600"/>
-              </a:spcAft>
-              <a:defRPr sz="1600" b="1">
-                <a:solidFill>
-                  <a:srgbClr val="113927"/>
-                </a:solidFill>
-                <a:latin typeface="Outfit"/>
-              </a:defRPr>
-            </a:pPr>
-            <a:r>
-              <a:t>⏱️ 3. Jornada Laboral y Cuantía Proporcional</a:t>
-            </a:r>
-          </a:p>
-          <a:p>
-            <a:pPr>
-              <a:spcAft>
-                <a:spcPts val="1400"/>
-              </a:spcAft>
-              <a:defRPr sz="1500">
-                <a:solidFill>
-                  <a:srgbClr val="2F3A30"/>
-                </a:solidFill>
-                <a:latin typeface="Calibri"/>
-              </a:defRPr>
-            </a:pPr>
-            <a:r>
-              <a:t>• Exigencia de jornada completa vs. tiempo parcial: Subvencionar jornadas muy reducidas genera precarización y subempleo involuntario.</a:t>
-            </a:r>
-            <a:br/>
-            <a:r>
-              <a:t>• La cuantía debe modularse proporcionalmente a las horas trabajadas (mínimo 50% de jornada) para evitar arbitrajes salariales.</a:t>
-            </a:r>
-          </a:p>
-          <a:p>
-            <a:pPr>
-              <a:spcAft>
-                <a:spcPts val="600"/>
-              </a:spcAft>
-              <a:defRPr sz="1600" b="1">
-                <a:solidFill>
-                  <a:srgbClr val="113927"/>
-                </a:solidFill>
-                <a:latin typeface="Outfit"/>
-              </a:defRPr>
-            </a:pPr>
-            <a:r>
-              <a:t>🔒 4. Cláusulas de Salvaguarda y Reintegro</a:t>
-            </a:r>
-          </a:p>
-          <a:p>
-            <a:pPr>
-              <a:defRPr sz="1500">
-                <a:solidFill>
-                  <a:srgbClr val="2F3A30"/>
-                </a:solidFill>
-                <a:latin typeface="Calibri"/>
-              </a:defRPr>
-            </a:pPr>
-            <a:r>
-              <a:t>• Compromiso de permanencia obligatoria (12 a 24 meses) y exigencia de incremento neto de plantilla.</a:t>
-            </a:r>
-            <a:br/>
-            <a:r>
-              <a:t>• Régimen sancionador disuasorio: Obligación de reintegro íntegro de la ayuda más intereses de demora si la empresa extingue el contrato improcedentemente antes del plazo.</a:t>
-            </a:r>
-          </a:p>
-        </p:txBody>
-      </p:sp>
-    </p:spTree>
-  </p:cSld>
-  <p:clrMapOvr>
-    <a:masterClrMapping/>
-  </p:clrMapOvr>
-</p:sld>
-</file>
-
-<file path=ppt/slides/slide14.xml><?xml version="1.0" encoding="utf-8"?>
-<p:sld xmlns:a="http://schemas.openxmlformats.org/drawingml/2006/main" xmlns:p="http://schemas.openxmlformats.org/presentationml/2006/main" xmlns:r="http://schemas.openxmlformats.org/officeDocument/2006/relationships">
-  <p:cSld>
-    <p:spTree>
-      <p:nvGrpSpPr>
-        <p:cNvPr id="1" name=""/>
-        <p:cNvGrpSpPr/>
-        <p:nvPr/>
-      </p:nvGrpSpPr>
-      <p:grpSpPr/>
-      <p:sp>
-        <p:nvSpPr>
-          <p:cNvPr id="2" name="TextBox 1"/>
-          <p:cNvSpPr txBox="1"/>
-          <p:nvPr/>
-        </p:nvSpPr>
-        <p:spPr>
-          <a:xfrm>
-            <a:off x="731520" y="365760"/>
-            <a:ext cx="9144000" cy="320040"/>
-          </a:xfrm>
-          <a:prstGeom prst="rect">
-            <a:avLst/>
-          </a:prstGeom>
-          <a:noFill/>
-        </p:spPr>
-        <p:txBody>
-          <a:bodyPr wrap="square" lIns="0" tIns="0" rIns="0" bIns="0">
-            <a:spAutoFit/>
-          </a:bodyPr>
-          <a:lstStyle/>
-          <a:p>
-            <a:pPr>
-              <a:defRPr sz="1100" b="1">
-                <a:solidFill>
-                  <a:srgbClr val="76927A"/>
-                </a:solidFill>
-                <a:latin typeface="Outfit"/>
-              </a:defRPr>
-            </a:pPr>
-            <a:r>
-              <a:t>FASE 3 · EVIDENCIA EMPÍRICA Y EVALUACIÓN CIENTÍFICA (45–75 MIN)</a:t>
-            </a:r>
-          </a:p>
-        </p:txBody>
-      </p:sp>
-      <p:sp>
-        <p:nvSpPr>
-          <p:cNvPr id="3" name="TextBox 2"/>
-          <p:cNvSpPr txBox="1"/>
-          <p:nvPr/>
-        </p:nvSpPr>
-        <p:spPr>
-          <a:xfrm>
-            <a:off x="731520" y="658368"/>
-            <a:ext cx="9601200" cy="502920"/>
-          </a:xfrm>
-          <a:prstGeom prst="rect">
-            <a:avLst/>
-          </a:prstGeom>
-          <a:noFill/>
-        </p:spPr>
-        <p:txBody>
-          <a:bodyPr wrap="square" lIns="0" tIns="0" rIns="0" bIns="0">
-            <a:spAutoFit/>
-          </a:bodyPr>
-          <a:lstStyle/>
-          <a:p>
-            <a:pPr>
-              <a:defRPr sz="2400" b="1">
-                <a:solidFill>
-                  <a:srgbClr val="113927"/>
-                </a:solidFill>
-                <a:latin typeface="Outfit"/>
-              </a:defRPr>
-            </a:pPr>
-            <a:r>
-              <a:t>Experimentos de Campo: El Experimento de Dayton y el Efecto Estigma</a:t>
-            </a:r>
-          </a:p>
-        </p:txBody>
-      </p:sp>
-      <p:pic>
-        <p:nvPicPr>
-          <p:cNvPr id="4" name="Picture 3" descr="image.png"/>
-          <p:cNvPicPr>
-            <a:picLocks noChangeAspect="1"/>
-          </p:cNvPicPr>
-          <p:nvPr/>
-        </p:nvPicPr>
-        <p:blipFill>
-          <a:blip r:embed="rId2"/>
-          <a:stretch>
-            <a:fillRect/>
-          </a:stretch>
-        </p:blipFill>
-        <p:spPr>
-          <a:xfrm>
-            <a:off x="10515600" y="411480"/>
-            <a:ext cx="926287" cy="292608"/>
-          </a:xfrm>
-          <a:prstGeom prst="rect">
-            <a:avLst/>
-          </a:prstGeom>
-        </p:spPr>
-      </p:pic>
-      <p:sp>
-        <p:nvSpPr>
-          <p:cNvPr id="5" name="Rounded Rectangle 4"/>
-          <p:cNvSpPr/>
-          <p:nvPr/>
-        </p:nvSpPr>
-        <p:spPr>
-          <a:xfrm>
-            <a:off x="731520" y="1371600"/>
-            <a:ext cx="5212080" cy="4846320"/>
-          </a:xfrm>
-          <a:prstGeom prst="roundRect">
-            <a:avLst/>
-          </a:prstGeom>
-          <a:solidFill>
-            <a:srgbClr val="F4F8F5"/>
-          </a:solidFill>
-          <a:ln w="19050">
-            <a:solidFill>
-              <a:srgbClr val="E98F71"/>
-            </a:solidFill>
-          </a:ln>
-        </p:spPr>
-        <p:style>
-          <a:lnRef idx="1">
-            <a:schemeClr val="accent1"/>
-          </a:lnRef>
-          <a:fillRef idx="3">
-            <a:schemeClr val="accent1"/>
-          </a:fillRef>
-          <a:effectRef idx="2">
-            <a:schemeClr val="accent1"/>
-          </a:effectRef>
-          <a:fontRef idx="minor">
-            <a:schemeClr val="lt1"/>
-          </a:fontRef>
-        </p:style>
-        <p:txBody>
-          <a:bodyPr rtlCol="0" anchor="ctr" wrap="square" lIns="274320" rIns="274320" tIns="274320"/>
-          <a:lstStyle/>
-          <a:p>
-            <a:pPr algn="ctr">
-              <a:spcAft>
-                <a:spcPts val="800"/>
-              </a:spcAft>
-              <a:defRPr sz="1600" b="1">
-                <a:solidFill>
-                  <a:srgbClr val="113927"/>
-                </a:solidFill>
-                <a:latin typeface="Outfit"/>
-              </a:defRPr>
-            </a:pPr>
-            <a:r>
-              <a:t>🧪 El Clásico Experimento de Dayton (Burtless, 1985)</a:t>
-            </a:r>
-          </a:p>
-          <a:p>
-            <a:pPr>
-              <a:spcAft>
-                <a:spcPts val="1000"/>
-              </a:spcAft>
-              <a:defRPr sz="1500">
-                <a:solidFill>
-                  <a:srgbClr val="2F3A30"/>
-                </a:solidFill>
-                <a:latin typeface="Calibri"/>
-              </a:defRPr>
-            </a:pPr>
-            <a:r>
-              <a:t>• El diseño experimental en Ohio (EE.UU.): A un grupo aleatorio de perceptores de asistencia social se les entregó un bono de subvención salarial para que lo presentaran en las entrevistas de trabajo. Un grupo de control buscó empleo sin bono.</a:t>
-            </a:r>
-          </a:p>
-          <a:p>
-            <a:pPr>
-              <a:spcAft>
-                <a:spcPts val="1000"/>
-              </a:spcAft>
-              <a:defRPr sz="1500" b="1">
-                <a:solidFill>
-                  <a:srgbClr val="E98F71"/>
-                </a:solidFill>
-                <a:latin typeface="Calibri"/>
-              </a:defRPr>
-            </a:pPr>
-            <a:r>
-              <a:t>• El resultado paradójico: ¡Los portadores del bono consiguieron significativamente MENOS empleo que el grupo sin ayuda (20,6% frente al 39,9%)!</a:t>
-            </a:r>
-          </a:p>
-          <a:p>
-            <a:pPr>
-              <a:defRPr sz="1500">
-                <a:solidFill>
-                  <a:srgbClr val="2F3A30"/>
-                </a:solidFill>
-                <a:latin typeface="Calibri"/>
-              </a:defRPr>
-            </a:pPr>
-            <a:r>
-              <a:t>• Explicación económica: Efecto Estigma y Señal Adversa. Los empresarios dedujeron que si el Gobierno tenía que pagarles para colocar al trabajador, era porque tenía baja productividad o problemas no observables.</a:t>
-            </a:r>
-          </a:p>
-        </p:txBody>
-      </p:sp>
-      <p:sp>
-        <p:nvSpPr>
-          <p:cNvPr id="6" name="Rounded Rectangle 5"/>
-          <p:cNvSpPr/>
-          <p:nvPr/>
-        </p:nvSpPr>
-        <p:spPr>
-          <a:xfrm>
-            <a:off x="6217920" y="1371600"/>
-            <a:ext cx="5212080" cy="4846320"/>
-          </a:xfrm>
-          <a:prstGeom prst="roundRect">
-            <a:avLst/>
-          </a:prstGeom>
-          <a:solidFill>
-            <a:srgbClr val="113927"/>
-          </a:solidFill>
-          <a:ln>
-            <a:solidFill>
-              <a:srgbClr val="113927"/>
-            </a:solidFill>
-          </a:ln>
-        </p:spPr>
-        <p:style>
-          <a:lnRef idx="1">
-            <a:schemeClr val="accent1"/>
-          </a:lnRef>
-          <a:fillRef idx="3">
-            <a:schemeClr val="accent1"/>
-          </a:fillRef>
-          <a:effectRef idx="2">
-            <a:schemeClr val="accent1"/>
-          </a:effectRef>
-          <a:fontRef idx="minor">
-            <a:schemeClr val="lt1"/>
-          </a:fontRef>
-        </p:style>
-        <p:txBody>
-          <a:bodyPr rtlCol="0" anchor="ctr" wrap="square" lIns="274320" rIns="274320" tIns="274320"/>
-          <a:lstStyle/>
-          <a:p>
-            <a:pPr algn="ctr">
-              <a:spcAft>
-                <a:spcPts val="800"/>
-              </a:spcAft>
-              <a:defRPr sz="1600" b="1">
-                <a:solidFill>
-                  <a:srgbClr val="EDB090"/>
-                </a:solidFill>
-                <a:latin typeface="Outfit"/>
-              </a:defRPr>
-            </a:pPr>
-            <a:r>
-              <a:t>📚 Evidencia Internacional de Peso Muerto</a:t>
-            </a:r>
-          </a:p>
-          <a:p>
-            <a:pPr>
-              <a:spcAft>
-                <a:spcPts val="1200"/>
-              </a:spcAft>
-              <a:defRPr sz="1500">
-                <a:solidFill>
-                  <a:srgbClr val="FFFFFF"/>
-                </a:solidFill>
-                <a:latin typeface="Calibri"/>
-              </a:defRPr>
-            </a:pPr>
-            <a:r>
-              <a:t>• Estudio de Brown (2015 · Francia): En programas de subvención salarial general a trabajadores de salarios bajos, el 84% de las contrataciones se habrían producido exactamente igual sin ayuda pública.</a:t>
-            </a:r>
-          </a:p>
-          <a:p>
-            <a:pPr>
-              <a:spcAft>
-                <a:spcPts val="1200"/>
-              </a:spcAft>
-              <a:defRPr sz="1500">
-                <a:solidFill>
-                  <a:srgbClr val="FFFFFF"/>
-                </a:solidFill>
-                <a:latin typeface="Calibri"/>
-              </a:defRPr>
-            </a:pPr>
-            <a:r>
-              <a:t>• Dictamen AIReF sobre el Contrato de Emprendedores: La bonificación aumentó ligeramente la probabilidad de empleo al inicio, pero tras expirar la ayuda la supervivencia laboral de los beneficiarios se igualó al resto.</a:t>
-            </a:r>
-          </a:p>
-          <a:p>
-            <a:pPr>
-              <a:defRPr sz="1500" b="1">
-                <a:solidFill>
-                  <a:srgbClr val="E98F71"/>
-                </a:solidFill>
-                <a:latin typeface="Calibri"/>
-              </a:defRPr>
-            </a:pPr>
-            <a:r>
-              <a:t>💡 Conclusión Teórica: Las subvenciones monetarias puras no corrigen las carencias formativas ni aumentan la productividad de equilibrio.</a:t>
-            </a:r>
-          </a:p>
-        </p:txBody>
-      </p:sp>
-    </p:spTree>
-  </p:cSld>
-  <p:clrMapOvr>
-    <a:masterClrMapping/>
-  </p:clrMapOvr>
-</p:sld>
-</file>
-
-<file path=ppt/slides/slide15.xml><?xml version="1.0" encoding="utf-8"?>
-<p:sld xmlns:a="http://schemas.openxmlformats.org/drawingml/2006/main" xmlns:p="http://schemas.openxmlformats.org/presentationml/2006/main" xmlns:r="http://schemas.openxmlformats.org/officeDocument/2006/relationships">
-  <p:cSld>
-    <p:spTree>
-      <p:nvGrpSpPr>
-        <p:cNvPr id="1" name=""/>
-        <p:cNvGrpSpPr/>
-        <p:nvPr/>
-      </p:nvGrpSpPr>
-      <p:grpSpPr/>
-      <p:sp>
-        <p:nvSpPr>
-          <p:cNvPr id="2" name="TextBox 1"/>
-          <p:cNvSpPr txBox="1"/>
-          <p:nvPr/>
-        </p:nvSpPr>
-        <p:spPr>
-          <a:xfrm>
-            <a:off x="731520" y="365760"/>
-            <a:ext cx="9144000" cy="320040"/>
-          </a:xfrm>
-          <a:prstGeom prst="rect">
-            <a:avLst/>
-          </a:prstGeom>
-          <a:noFill/>
-        </p:spPr>
-        <p:txBody>
-          <a:bodyPr wrap="square" lIns="0" tIns="0" rIns="0" bIns="0">
-            <a:spAutoFit/>
-          </a:bodyPr>
-          <a:lstStyle/>
-          <a:p>
-            <a:pPr>
-              <a:defRPr sz="1100" b="1">
-                <a:solidFill>
-                  <a:srgbClr val="76927A"/>
-                </a:solidFill>
-                <a:latin typeface="Outfit"/>
-              </a:defRPr>
-            </a:pPr>
-            <a:r>
-              <a:t>FASE 4 · MARCO INSTITUCIONAL Y FINANCIACIÓN (75–95 MIN)</a:t>
-            </a:r>
-          </a:p>
-        </p:txBody>
-      </p:sp>
-      <p:sp>
-        <p:nvSpPr>
-          <p:cNvPr id="3" name="TextBox 2"/>
-          <p:cNvSpPr txBox="1"/>
-          <p:nvPr/>
-        </p:nvSpPr>
-        <p:spPr>
-          <a:xfrm>
-            <a:off x="731520" y="658368"/>
-            <a:ext cx="9601200" cy="502920"/>
-          </a:xfrm>
-          <a:prstGeom prst="rect">
-            <a:avLst/>
-          </a:prstGeom>
-          <a:noFill/>
-        </p:spPr>
-        <p:txBody>
-          <a:bodyPr wrap="square" lIns="0" tIns="0" rIns="0" bIns="0">
-            <a:spAutoFit/>
-          </a:bodyPr>
-          <a:lstStyle/>
-          <a:p>
-            <a:pPr>
-              <a:defRPr sz="2400" b="1">
-                <a:solidFill>
-                  <a:srgbClr val="113927"/>
-                </a:solidFill>
-                <a:latin typeface="Outfit"/>
-              </a:defRPr>
-            </a:pPr>
-            <a:r>
-              <a:t>La Arquitectura Financiera Europea: Del FSE+ a las CCAA (§5.1 - §5.2)</a:t>
-            </a:r>
-          </a:p>
-        </p:txBody>
-      </p:sp>
-      <p:pic>
-        <p:nvPicPr>
-          <p:cNvPr id="4" name="Picture 3" descr="image.png"/>
-          <p:cNvPicPr>
-            <a:picLocks noChangeAspect="1"/>
-          </p:cNvPicPr>
-          <p:nvPr/>
-        </p:nvPicPr>
-        <p:blipFill>
-          <a:blip r:embed="rId2"/>
-          <a:stretch>
-            <a:fillRect/>
-          </a:stretch>
-        </p:blipFill>
-        <p:spPr>
-          <a:xfrm>
-            <a:off x="10515600" y="411480"/>
-            <a:ext cx="926287" cy="292608"/>
-          </a:xfrm>
-          <a:prstGeom prst="rect">
-            <a:avLst/>
-          </a:prstGeom>
-        </p:spPr>
-      </p:pic>
-      <p:sp>
-        <p:nvSpPr>
-          <p:cNvPr id="5" name="Rounded Rectangle 4"/>
-          <p:cNvSpPr/>
-          <p:nvPr/>
-        </p:nvSpPr>
-        <p:spPr>
-          <a:xfrm>
-            <a:off x="731520" y="1371600"/>
-            <a:ext cx="5212080" cy="4846320"/>
-          </a:xfrm>
-          <a:prstGeom prst="roundRect">
-            <a:avLst/>
-          </a:prstGeom>
-          <a:solidFill>
-            <a:srgbClr val="F4F8F5"/>
-          </a:solidFill>
-          <a:ln w="19050">
-            <a:solidFill>
-              <a:srgbClr val="76927A"/>
-            </a:solidFill>
-          </a:ln>
-        </p:spPr>
-        <p:style>
-          <a:lnRef idx="1">
-            <a:schemeClr val="accent1"/>
-          </a:lnRef>
-          <a:fillRef idx="3">
-            <a:schemeClr val="accent1"/>
-          </a:fillRef>
-          <a:effectRef idx="2">
-            <a:schemeClr val="accent1"/>
-          </a:effectRef>
-          <a:fontRef idx="minor">
-            <a:schemeClr val="lt1"/>
-          </a:fontRef>
-        </p:style>
-        <p:txBody>
-          <a:bodyPr rtlCol="0" anchor="ctr" wrap="square" lIns="274320" rIns="274320" tIns="274320"/>
-          <a:lstStyle/>
-          <a:p>
-            <a:pPr algn="ctr">
-              <a:spcAft>
-                <a:spcPts val="800"/>
-              </a:spcAft>
-              <a:defRPr sz="1600" b="1">
-                <a:solidFill>
-                  <a:srgbClr val="113927"/>
-                </a:solidFill>
-                <a:latin typeface="Outfit"/>
-              </a:defRPr>
-            </a:pPr>
-            <a:r>
-              <a:t>🇪🇺 ¿Quién Financia los Incentivos? El FSE+ 2021-2027</a:t>
-            </a:r>
-          </a:p>
-          <a:p>
-            <a:pPr>
-              <a:spcAft>
-                <a:spcPts val="1200"/>
-              </a:spcAft>
-              <a:defRPr sz="1500">
-                <a:solidFill>
-                  <a:srgbClr val="2F3A30"/>
-                </a:solidFill>
-                <a:latin typeface="Calibri"/>
-              </a:defRPr>
-            </a:pPr>
-            <a:r>
-              <a:t>• Cofinanciación europea: El Programa Emplea-T y las principales ayudas autonómicas están cofinanciadas por el Fondo Social Europeo Plus (FSE+).</a:t>
-            </a:r>
-            <a:br/>
-            <a:r>
-              <a:t>• En Andalucía (región en transición), la Unión Europea aporta hasta el 85% de cada euro gastado en contratación indefinida.</a:t>
-            </a:r>
-          </a:p>
-          <a:p>
-            <a:pPr>
-              <a:defRPr sz="1500">
-                <a:solidFill>
-                  <a:srgbClr val="2F3A30"/>
-                </a:solidFill>
-                <a:latin typeface="Calibri"/>
-              </a:defRPr>
-            </a:pPr>
-            <a:r>
-              <a:t>• Gobernanza y Semestre Europeo: El Reglamento UE 2021/1057 condiciona estos fondos al cumplimiento de las Recomendaciones Específicas por País (CSR) del Consejo de la UE.</a:t>
-            </a:r>
-          </a:p>
-        </p:txBody>
-      </p:sp>
-      <p:sp>
-        <p:nvSpPr>
-          <p:cNvPr id="6" name="Rounded Rectangle 5"/>
-          <p:cNvSpPr/>
-          <p:nvPr/>
-        </p:nvSpPr>
-        <p:spPr>
-          <a:xfrm>
-            <a:off x="6217920" y="1371600"/>
-            <a:ext cx="5212080" cy="4846320"/>
-          </a:xfrm>
-          <a:prstGeom prst="roundRect">
-            <a:avLst/>
-          </a:prstGeom>
-          <a:solidFill>
-            <a:srgbClr val="F4F8F5"/>
-          </a:solidFill>
-          <a:ln w="19050">
-            <a:solidFill>
-              <a:srgbClr val="76927A"/>
-            </a:solidFill>
-          </a:ln>
-        </p:spPr>
-        <p:style>
-          <a:lnRef idx="1">
-            <a:schemeClr val="accent1"/>
-          </a:lnRef>
-          <a:fillRef idx="3">
-            <a:schemeClr val="accent1"/>
-          </a:fillRef>
-          <a:effectRef idx="2">
-            <a:schemeClr val="accent1"/>
-          </a:effectRef>
-          <a:fontRef idx="minor">
-            <a:schemeClr val="lt1"/>
-          </a:fontRef>
-        </p:style>
-        <p:txBody>
-          <a:bodyPr rtlCol="0" anchor="ctr" wrap="square" lIns="274320" rIns="274320" tIns="274320"/>
-          <a:lstStyle/>
-          <a:p>
-            <a:pPr algn="ctr">
-              <a:spcAft>
-                <a:spcPts val="800"/>
-              </a:spcAft>
-              <a:defRPr sz="1600" b="1">
-                <a:solidFill>
-                  <a:srgbClr val="113927"/>
-                </a:solidFill>
-                <a:latin typeface="Outfit"/>
-              </a:defRPr>
-            </a:pPr>
-            <a:r>
-              <a:t>📋 Garantía Juvenil y Principios de la UE (§5.1)</a:t>
-            </a:r>
-          </a:p>
-          <a:p>
-            <a:pPr>
-              <a:spcAft>
-                <a:spcPts val="1200"/>
-              </a:spcAft>
-              <a:defRPr sz="1500">
-                <a:solidFill>
-                  <a:srgbClr val="2F3A30"/>
-                </a:solidFill>
-                <a:latin typeface="Calibri"/>
-              </a:defRPr>
-            </a:pPr>
-            <a:r>
-              <a:t>• El Sistema Nacional de Garantía Juvenil (SNGJ): Compromiso europeo de ofrecer una oportunidad de empleo, formación o prácticas en un plazo máximo de 4 meses tras terminar estudios o quedar desempleado.</a:t>
-            </a:r>
-          </a:p>
-          <a:p>
-            <a:pPr>
-              <a:spcAft>
-                <a:spcPts val="1200"/>
-              </a:spcAft>
-              <a:defRPr sz="1500">
-                <a:solidFill>
-                  <a:srgbClr val="2F3A30"/>
-                </a:solidFill>
-                <a:latin typeface="Calibri"/>
-              </a:defRPr>
-            </a:pPr>
-            <a:r>
-              <a:t>• El Principio de Adicionalidad: Bruselas prohíbe financiar gastos corrientes rutinarios de las empresas; el incentivo debe ser estrictamente complementario para generar valor neto.</a:t>
-            </a:r>
-          </a:p>
-          <a:p>
-            <a:pPr>
-              <a:defRPr sz="1500" b="1">
-                <a:solidFill>
-                  <a:srgbClr val="E98F71"/>
-                </a:solidFill>
-                <a:latin typeface="Calibri"/>
-              </a:defRPr>
-            </a:pPr>
-            <a:r>
-              <a:t>• El cuello de botella de absorción: La rigidez administrativa provoca a menudo un 'gasto apresurado' a cierre de convocatoria para no devolver fondos.</a:t>
-            </a:r>
-          </a:p>
-        </p:txBody>
-      </p:sp>
-    </p:spTree>
-  </p:cSld>
-  <p:clrMapOvr>
-    <a:masterClrMapping/>
-  </p:clrMapOvr>
-</p:sld>
-</file>
-
-<file path=ppt/slides/slide16.xml><?xml version="1.0" encoding="utf-8"?>
-<p:sld xmlns:a="http://schemas.openxmlformats.org/drawingml/2006/main" xmlns:p="http://schemas.openxmlformats.org/presentationml/2006/main" xmlns:r="http://schemas.openxmlformats.org/officeDocument/2006/relationships">
-  <p:cSld>
-    <p:spTree>
-      <p:nvGrpSpPr>
-        <p:cNvPr id="1" name=""/>
-        <p:cNvGrpSpPr/>
-        <p:nvPr/>
-      </p:nvGrpSpPr>
-      <p:grpSpPr/>
-      <p:sp>
-        <p:nvSpPr>
-          <p:cNvPr id="2" name="TextBox 1"/>
-          <p:cNvSpPr txBox="1"/>
-          <p:nvPr/>
-        </p:nvSpPr>
-        <p:spPr>
-          <a:xfrm>
-            <a:off x="731520" y="365760"/>
-            <a:ext cx="9144000" cy="320040"/>
-          </a:xfrm>
-          <a:prstGeom prst="rect">
-            <a:avLst/>
-          </a:prstGeom>
-          <a:noFill/>
-        </p:spPr>
-        <p:txBody>
-          <a:bodyPr wrap="square" lIns="0" tIns="0" rIns="0" bIns="0">
-            <a:spAutoFit/>
-          </a:bodyPr>
-          <a:lstStyle/>
-          <a:p>
-            <a:pPr>
-              <a:defRPr sz="1100" b="1">
-                <a:solidFill>
-                  <a:srgbClr val="76927A"/>
-                </a:solidFill>
-                <a:latin typeface="Outfit"/>
-              </a:defRPr>
-            </a:pPr>
-            <a:r>
-              <a:t>FASE 4 · TALLER PRÁCTICO GUIADO (75–95 MIN)</a:t>
-            </a:r>
-          </a:p>
-        </p:txBody>
-      </p:sp>
-      <p:sp>
-        <p:nvSpPr>
-          <p:cNvPr id="3" name="TextBox 2"/>
-          <p:cNvSpPr txBox="1"/>
-          <p:nvPr/>
-        </p:nvSpPr>
-        <p:spPr>
-          <a:xfrm>
-            <a:off x="731520" y="658368"/>
-            <a:ext cx="9601200" cy="502920"/>
-          </a:xfrm>
-          <a:prstGeom prst="rect">
-            <a:avLst/>
-          </a:prstGeom>
-          <a:noFill/>
-        </p:spPr>
-        <p:txBody>
-          <a:bodyPr wrap="square" lIns="0" tIns="0" rIns="0" bIns="0">
-            <a:spAutoFit/>
-          </a:bodyPr>
-          <a:lstStyle/>
-          <a:p>
-            <a:pPr>
-              <a:defRPr sz="2400" b="1">
-                <a:solidFill>
-                  <a:srgbClr val="113927"/>
-                </a:solidFill>
-                <a:latin typeface="Outfit"/>
-              </a:defRPr>
-            </a:pPr>
-            <a:r>
-              <a:t>Mini-Caso Guiado de Pizarra: Auditoría de un Plan de Contratación</a:t>
-            </a:r>
-          </a:p>
-        </p:txBody>
-      </p:sp>
-      <p:pic>
-        <p:nvPicPr>
-          <p:cNvPr id="4" name="Picture 3" descr="image.png"/>
-          <p:cNvPicPr>
-            <a:picLocks noChangeAspect="1"/>
-          </p:cNvPicPr>
-          <p:nvPr/>
-        </p:nvPicPr>
-        <p:blipFill>
-          <a:blip r:embed="rId2"/>
-          <a:stretch>
-            <a:fillRect/>
-          </a:stretch>
-        </p:blipFill>
-        <p:spPr>
-          <a:xfrm>
-            <a:off x="10515600" y="411480"/>
-            <a:ext cx="926287" cy="292608"/>
-          </a:xfrm>
-          <a:prstGeom prst="rect">
-            <a:avLst/>
-          </a:prstGeom>
-        </p:spPr>
-      </p:pic>
-      <p:sp>
-        <p:nvSpPr>
-          <p:cNvPr id="5" name="Rounded Rectangle 4"/>
-          <p:cNvSpPr/>
-          <p:nvPr/>
-        </p:nvSpPr>
-        <p:spPr>
-          <a:xfrm>
-            <a:off x="731520" y="1371600"/>
-            <a:ext cx="5212080" cy="4846320"/>
-          </a:xfrm>
-          <a:prstGeom prst="roundRect">
-            <a:avLst/>
-          </a:prstGeom>
-          <a:solidFill>
-            <a:srgbClr val="F4F8F5"/>
-          </a:solidFill>
-          <a:ln w="19050">
-            <a:solidFill>
-              <a:srgbClr val="113927"/>
-            </a:solidFill>
-          </a:ln>
-        </p:spPr>
-        <p:style>
-          <a:lnRef idx="1">
-            <a:schemeClr val="accent1"/>
-          </a:lnRef>
-          <a:fillRef idx="3">
-            <a:schemeClr val="accent1"/>
-          </a:fillRef>
-          <a:effectRef idx="2">
-            <a:schemeClr val="accent1"/>
-          </a:effectRef>
-          <a:fontRef idx="minor">
-            <a:schemeClr val="lt1"/>
-          </a:fontRef>
-        </p:style>
-        <p:txBody>
-          <a:bodyPr rtlCol="0" anchor="ctr" wrap="square" lIns="274320" rIns="274320" tIns="274320"/>
-          <a:lstStyle/>
-          <a:p>
-            <a:pPr algn="ctr">
-              <a:spcAft>
-                <a:spcPts val="800"/>
-              </a:spcAft>
-              <a:defRPr sz="1600" b="1">
-                <a:solidFill>
-                  <a:srgbClr val="113927"/>
-                </a:solidFill>
-                <a:latin typeface="Outfit"/>
-              </a:defRPr>
-            </a:pPr>
-            <a:r>
-              <a:t>📝 Enunciado del Caso (Resolución en Directo)</a:t>
-            </a:r>
-          </a:p>
-          <a:p>
-            <a:pPr>
-              <a:spcAft>
-                <a:spcPts val="1200"/>
-              </a:spcAft>
-              <a:defRPr sz="1500">
-                <a:solidFill>
-                  <a:srgbClr val="2F3A30"/>
-                </a:solidFill>
-                <a:latin typeface="Calibri"/>
-              </a:defRPr>
-            </a:pPr>
-            <a:r>
-              <a:t>Una comunidad autónoma aprueba el 'Plan Impulsa Pyme' con 16 Millones de Euros (16 M€).</a:t>
-            </a:r>
-            <a:br/>
-            <a:br/>
-            <a:r>
-              <a:t>• Otorga 8.000 € a fondo perdido por cada contrato indefinido formalizado con desempleados sénior.</a:t>
-            </a:r>
-            <a:br/>
-            <a:r>
-              <a:t>• Se agota el presupuesto formalizando 2.000 contratos subvencionados (S = 2.000).</a:t>
-            </a:r>
-          </a:p>
-          <a:p>
-            <a:pPr>
-              <a:defRPr sz="1500" b="1">
-                <a:solidFill>
-                  <a:srgbClr val="E98F71"/>
-                </a:solidFill>
-                <a:latin typeface="Calibri"/>
-              </a:defRPr>
-            </a:pPr>
-            <a:r>
-              <a:t>Datos de auditoría ex-post:</a:t>
-            </a:r>
-            <a:br/>
-            <a:r>
-              <a:t>• Tasa de Peso Muerto (pm): 60%</a:t>
-            </a:r>
-            <a:br/>
-            <a:r>
-              <a:t>• Tasa de Sustitución (s): 15%</a:t>
-            </a:r>
-            <a:br/>
-            <a:r>
-              <a:t>• Tasa de Desplazamiento (d): 5%</a:t>
-            </a:r>
-            <a:br/>
-            <a:br/>
-            <a:r>
-              <a:t>👉 Preguntas: ¿Cuántos empleos netos se han creado? ¿Cuál es el coste efectivo por cada empleo adicional?</a:t>
-            </a:r>
-          </a:p>
-        </p:txBody>
-      </p:sp>
-      <p:sp>
-        <p:nvSpPr>
-          <p:cNvPr id="6" name="Rounded Rectangle 5"/>
-          <p:cNvSpPr/>
-          <p:nvPr/>
-        </p:nvSpPr>
-        <p:spPr>
-          <a:xfrm>
-            <a:off x="6217920" y="1371600"/>
-            <a:ext cx="5212080" cy="4846320"/>
-          </a:xfrm>
-          <a:prstGeom prst="roundRect">
-            <a:avLst/>
-          </a:prstGeom>
-          <a:solidFill>
-            <a:srgbClr val="113927"/>
-          </a:solidFill>
-          <a:ln>
-            <a:solidFill>
-              <a:srgbClr val="113927"/>
-            </a:solidFill>
-          </a:ln>
-        </p:spPr>
-        <p:style>
-          <a:lnRef idx="1">
-            <a:schemeClr val="accent1"/>
-          </a:lnRef>
-          <a:fillRef idx="3">
-            <a:schemeClr val="accent1"/>
-          </a:fillRef>
-          <a:effectRef idx="2">
-            <a:schemeClr val="accent1"/>
-          </a:effectRef>
-          <a:fontRef idx="minor">
-            <a:schemeClr val="lt1"/>
-          </a:fontRef>
-        </p:style>
-        <p:txBody>
-          <a:bodyPr rtlCol="0" anchor="ctr" wrap="square" lIns="274320" rIns="274320" tIns="274320"/>
-          <a:lstStyle/>
-          <a:p>
-            <a:pPr algn="ctr">
-              <a:spcAft>
-                <a:spcPts val="800"/>
-              </a:spcAft>
-              <a:defRPr sz="1600" b="1">
-                <a:solidFill>
-                  <a:srgbClr val="EDB090"/>
-                </a:solidFill>
-                <a:latin typeface="Outfit"/>
-              </a:defRPr>
-            </a:pPr>
-            <a:r>
-              <a:t>🧮 Resolución Paso a Paso en Pizarra</a:t>
-            </a:r>
-          </a:p>
-          <a:p>
-            <a:pPr>
-              <a:spcAft>
-                <a:spcPts val="1000"/>
-              </a:spcAft>
-              <a:defRPr sz="1400" b="1">
-                <a:solidFill>
-                  <a:srgbClr val="FFFFFF"/>
-                </a:solidFill>
-                <a:latin typeface="Calibri"/>
-              </a:defRPr>
-            </a:pPr>
-            <a:r>
-              <a:t>1. Tasa de Pérdida Total:</a:t>
-            </a:r>
-            <a:br/>
-            <a:r>
-              <a:t>   Pérdida = pm + s + d = 0,60 + 0,15 + 0,05 = 0,80 (80%)</a:t>
-            </a:r>
-            <a:br/>
-            <a:br/>
-            <a:r>
-              <a:t>2. Tasa de Éxito Neto Efectivo:</a:t>
-            </a:r>
-            <a:br/>
-            <a:r>
-              <a:t>   Tasa Neta = 1 − 0,80 = 0,20 (20%)</a:t>
-            </a:r>
-            <a:br/>
-            <a:br/>
-            <a:r>
-              <a:t>3. Empleo Neto Real Creado (ΔN_neto):</a:t>
-            </a:r>
-            <a:br/>
-            <a:r>
-              <a:t>   ΔN_neto = 2.000 · 0,20 = 400 empleos netos</a:t>
-            </a:r>
-            <a:br/>
-            <a:r>
-              <a:t>   (1.600 contratos no crearon ningún empleo adicional)</a:t>
-            </a:r>
-            <a:br/>
-            <a:br/>
-            <a:r>
-              <a:t>4. Coste Fiscal Efectivo por Empleo Neto:</a:t>
-            </a:r>
-            <a:br/>
-            <a:r>
-              <a:t>   Coste = 16.000.000 € / 400 = 40.000 € por empleo</a:t>
-            </a:r>
-            <a:br/>
-            <a:r>
-              <a:t>   (O bien: 8.000 € · [1 / 0,20] = 8.000 · 5 = 40.000 €)</a:t>
-            </a:r>
-          </a:p>
-          <a:p>
-            <a:pPr>
-              <a:defRPr sz="1400" b="1">
-                <a:solidFill>
-                  <a:srgbClr val="E98F71"/>
-                </a:solidFill>
-                <a:latin typeface="Calibri"/>
-              </a:defRPr>
-            </a:pPr>
-            <a:r>
-              <a:t>¡El coste real quintuplica la ayuda nominal por culpa del 80% de ineficiencia!</a:t>
             </a:r>
           </a:p>
         </p:txBody>
@@ -6939,7 +7308,7 @@
               </a:defRPr>
             </a:pPr>
             <a:r>
-              <a:t>FASE 3 · ANATOMÍA DE LAS INEFICIENCIAS PÚBLICAS (45–75 MIN)</a:t>
+              <a:t>FASE 2 · INSTRUMENTOS Y VARIABLES DE DISEÑO (20–45 MIN)</a:t>
             </a:r>
           </a:p>
         </p:txBody>
@@ -6975,14 +7344,14 @@
               </a:defRPr>
             </a:pPr>
             <a:r>
-              <a:t>Los 6 Efectos No Deseados de los Incentivos a la Contratación</a:t>
+              <a:t>Las 4 Palancas Críticas de Diseño Normativo (§4.3)</a:t>
             </a:r>
           </a:p>
         </p:txBody>
       </p:sp>
       <p:pic>
         <p:nvPicPr>
-          <p:cNvPr id="4" name="Picture 3" descr="psll_lockup.png"/>
+          <p:cNvPr id="4" name="Picture 3" descr="image.png"/>
           <p:cNvPicPr>
             <a:picLocks noChangeAspect="1"/>
           </p:cNvPicPr>
@@ -7013,149 +7382,7 @@
         <p:spPr>
           <a:xfrm>
             <a:off x="731520" y="1371600"/>
-            <a:ext cx="5212080" cy="1508760"/>
-          </a:xfrm>
-          <a:prstGeom prst="roundRect">
-            <a:avLst/>
-          </a:prstGeom>
-          <a:solidFill>
-            <a:srgbClr val="F4F8F5"/>
-          </a:solidFill>
-          <a:ln w="19050">
-            <a:solidFill>
-              <a:srgbClr val="E98F71"/>
-            </a:solidFill>
-          </a:ln>
-        </p:spPr>
-        <p:style>
-          <a:lnRef idx="1">
-            <a:schemeClr val="accent1"/>
-          </a:lnRef>
-          <a:fillRef idx="3">
-            <a:schemeClr val="accent1"/>
-          </a:fillRef>
-          <a:effectRef idx="2">
-            <a:schemeClr val="accent1"/>
-          </a:effectRef>
-          <a:fontRef idx="minor">
-            <a:schemeClr val="lt1"/>
-          </a:fontRef>
-        </p:style>
-        <p:txBody>
-          <a:bodyPr wrap="square" lIns="182880" tIns="182880" rIns="182880" rtlCol="0" anchor="ctr"/>
-          <a:lstStyle/>
-          <a:p>
-            <a:pPr algn="ctr">
-              <a:spcAft>
-                <a:spcPts val="400"/>
-              </a:spcAft>
-              <a:defRPr sz="1600" b="1">
-                <a:solidFill>
-                  <a:srgbClr val="E98F71"/>
-                </a:solidFill>
-                <a:latin typeface="Outfit"/>
-              </a:defRPr>
-            </a:pPr>
-            <a:r>
-              <a:t>1. Peso Muerto (Deadweight)</a:t>
-            </a:r>
-          </a:p>
-          <a:p>
-            <a:pPr>
-              <a:defRPr sz="1600">
-                <a:solidFill>
-                  <a:srgbClr val="2F3A30"/>
-                </a:solidFill>
-                <a:latin typeface="Calibri"/>
-              </a:defRPr>
-            </a:pPr>
-            <a:r>
-              <a:t>Contrataciones subvencionadas que la empresa habría realizado igualmente sin la ayuda por necesidades de demanda. (60% - 80% del gasto).</a:t>
-            </a:r>
-          </a:p>
-        </p:txBody>
-      </p:sp>
-      <p:sp>
-        <p:nvSpPr>
-          <p:cNvPr id="6" name="Rounded Rectangle 5"/>
-          <p:cNvSpPr/>
-          <p:nvPr/>
-        </p:nvSpPr>
-        <p:spPr>
-          <a:xfrm>
-            <a:off x="6126480" y="1371600"/>
-            <a:ext cx="5212080" cy="1508760"/>
-          </a:xfrm>
-          <a:prstGeom prst="roundRect">
-            <a:avLst/>
-          </a:prstGeom>
-          <a:solidFill>
-            <a:srgbClr val="F4F8F5"/>
-          </a:solidFill>
-          <a:ln w="19050">
-            <a:solidFill>
-              <a:srgbClr val="113927"/>
-            </a:solidFill>
-          </a:ln>
-        </p:spPr>
-        <p:style>
-          <a:lnRef idx="1">
-            <a:schemeClr val="accent1"/>
-          </a:lnRef>
-          <a:fillRef idx="3">
-            <a:schemeClr val="accent1"/>
-          </a:fillRef>
-          <a:effectRef idx="2">
-            <a:schemeClr val="accent1"/>
-          </a:effectRef>
-          <a:fontRef idx="minor">
-            <a:schemeClr val="lt1"/>
-          </a:fontRef>
-        </p:style>
-        <p:txBody>
-          <a:bodyPr wrap="square" lIns="182880" tIns="182880" rIns="182880" rtlCol="0" anchor="ctr"/>
-          <a:lstStyle/>
-          <a:p>
-            <a:pPr algn="ctr">
-              <a:spcAft>
-                <a:spcPts val="400"/>
-              </a:spcAft>
-              <a:defRPr sz="1600" b="1">
-                <a:solidFill>
-                  <a:srgbClr val="113927"/>
-                </a:solidFill>
-                <a:latin typeface="Outfit"/>
-              </a:defRPr>
-            </a:pPr>
-            <a:r>
-              <a:t>2. Efecto Sustitución</a:t>
-            </a:r>
-          </a:p>
-          <a:p>
-            <a:pPr>
-              <a:defRPr sz="1600">
-                <a:solidFill>
-                  <a:srgbClr val="2F3A30"/>
-                </a:solidFill>
-                <a:latin typeface="Calibri"/>
-              </a:defRPr>
-            </a:pPr>
-            <a:r>
-              <a:t>La empresa despide o no renueva a un trabajador ordinario para contratar a uno subvencionado, sin crear empleo neto.</a:t>
-            </a:r>
-          </a:p>
-        </p:txBody>
-      </p:sp>
-      <p:sp>
-        <p:nvSpPr>
-          <p:cNvPr id="7" name="Rounded Rectangle 6"/>
-          <p:cNvSpPr/>
-          <p:nvPr/>
-        </p:nvSpPr>
-        <p:spPr>
-          <a:xfrm>
-            <a:off x="731520" y="3017520"/>
-            <a:ext cx="5212080" cy="1508760"/>
+            <a:ext cx="5212080" cy="4846320"/>
           </a:xfrm>
           <a:prstGeom prst="roundRect">
             <a:avLst/>
@@ -7184,27 +7411,30 @@
           </a:fontRef>
         </p:style>
         <p:txBody>
-          <a:bodyPr wrap="square" lIns="182880" tIns="182880" rIns="182880" rtlCol="0" anchor="ctr"/>
+          <a:bodyPr wrap="square" lIns="274320" tIns="274320" rIns="274320" rtlCol="0" anchor="ctr"/>
           <a:lstStyle/>
           <a:p>
             <a:pPr algn="ctr">
               <a:spcAft>
-                <a:spcPts val="400"/>
+                <a:spcPts val="600"/>
               </a:spcAft>
               <a:defRPr sz="1600" b="1">
                 <a:solidFill>
-                  <a:srgbClr val="76927A"/>
+                  <a:srgbClr val="113927"/>
                 </a:solidFill>
                 <a:latin typeface="Outfit"/>
               </a:defRPr>
             </a:pPr>
             <a:r>
-              <a:t>3. Efecto Desplazamiento</a:t>
+              <a:t>🎯 1. Colectivo Diana y Focalización</a:t>
             </a:r>
           </a:p>
           <a:p>
             <a:pPr>
-              <a:defRPr sz="1600">
+              <a:spcAft>
+                <a:spcPts val="1400"/>
+              </a:spcAft>
+              <a:defRPr sz="1500">
                 <a:solidFill>
                   <a:srgbClr val="2F3A30"/>
                 </a:solidFill>
@@ -7212,163 +7442,58 @@
               </a:defRPr>
             </a:pPr>
             <a:r>
-              <a:t>Las empresas con ayudas reducen costes y expulsan del mercado a competidores eficientes no subvencionados.</a:t>
-            </a:r>
-          </a:p>
-        </p:txBody>
-      </p:sp>
-      <p:sp>
-        <p:nvSpPr>
-          <p:cNvPr id="8" name="Rounded Rectangle 7"/>
+              <a:t>• Universal vs. Restringido: Cuanto más general sea el incentivo, mayor es el peso muerto. Para que sea eficiente debe dirigirse estrictamente a parados de larga duración (&gt; 12 meses) o sin titulación.</a:t>
+            </a:r>
+            <a:br/>
+            <a:r>
+              <a:t>• Si se subsidia a perfiles con alta empleabilidad espontánea (ej. ingenieros junior), el peso muerto roza el 90%.</a:t>
+            </a:r>
+          </a:p>
+          <a:p>
+            <a:pPr>
+              <a:spcAft>
+                <a:spcPts val="600"/>
+              </a:spcAft>
+              <a:defRPr sz="1600" b="1">
+                <a:solidFill>
+                  <a:srgbClr val="113927"/>
+                </a:solidFill>
+                <a:latin typeface="Outfit"/>
+              </a:defRPr>
+            </a:pPr>
+            <a:r>
+              <a:t>🔄 2. La Trampa de la 'Conversión' Temporal</a:t>
+            </a:r>
+          </a:p>
+          <a:p>
+            <a:pPr>
+              <a:defRPr sz="1500">
+                <a:solidFill>
+                  <a:srgbClr val="2F3A30"/>
+                </a:solidFill>
+                <a:latin typeface="Calibri"/>
+              </a:defRPr>
+            </a:pPr>
+            <a:r>
+              <a:t>• Nueva contratación vs. Transformación a indefinido: En España se destinan cientos de millones a primar la conversión.</a:t>
+            </a:r>
+            <a:br/>
+            <a:r>
+              <a:t>• Dictamen AIReF: El peso muerto supera el 85%. La empresa ya conoce la productividad del empleado y lo iba a retener igualmente sin dinero público.</a:t>
+            </a:r>
+          </a:p>
+        </p:txBody>
+      </p:sp>
+      <p:sp>
+        <p:nvSpPr>
+          <p:cNvPr id="6" name="Rounded Rectangle 5"/>
           <p:cNvSpPr/>
           <p:nvPr/>
         </p:nvSpPr>
         <p:spPr>
           <a:xfrm>
-            <a:off x="6126480" y="3017520"/>
-            <a:ext cx="5212080" cy="1508760"/>
-          </a:xfrm>
-          <a:prstGeom prst="roundRect">
-            <a:avLst/>
-          </a:prstGeom>
-          <a:solidFill>
-            <a:srgbClr val="F4F8F5"/>
-          </a:solidFill>
-          <a:ln w="19050">
-            <a:solidFill>
-              <a:srgbClr val="113927"/>
-            </a:solidFill>
-          </a:ln>
-        </p:spPr>
-        <p:style>
-          <a:lnRef idx="1">
-            <a:schemeClr val="accent1"/>
-          </a:lnRef>
-          <a:fillRef idx="3">
-            <a:schemeClr val="accent1"/>
-          </a:fillRef>
-          <a:effectRef idx="2">
-            <a:schemeClr val="accent1"/>
-          </a:effectRef>
-          <a:fontRef idx="minor">
-            <a:schemeClr val="lt1"/>
-          </a:fontRef>
-        </p:style>
-        <p:txBody>
-          <a:bodyPr wrap="square" lIns="182880" tIns="182880" rIns="182880" rtlCol="0" anchor="ctr"/>
-          <a:lstStyle/>
-          <a:p>
-            <a:pPr algn="ctr">
-              <a:spcAft>
-                <a:spcPts val="400"/>
-              </a:spcAft>
-              <a:defRPr sz="1600" b="1">
-                <a:solidFill>
-                  <a:srgbClr val="113927"/>
-                </a:solidFill>
-                <a:latin typeface="Outfit"/>
-              </a:defRPr>
-            </a:pPr>
-            <a:r>
-              <a:t>4. Descremado (Creaming)</a:t>
-            </a:r>
-          </a:p>
-          <a:p>
-            <a:pPr>
-              <a:defRPr sz="1600">
-                <a:solidFill>
-                  <a:srgbClr val="2F3A30"/>
-                </a:solidFill>
-                <a:latin typeface="Calibri"/>
-              </a:defRPr>
-            </a:pPr>
-            <a:r>
-              <a:t>El empleador selecciona dentro del colectivo subvencionado a los candidatos más cualificados, excluyendo a los más vulnerables.</a:t>
-            </a:r>
-          </a:p>
-        </p:txBody>
-      </p:sp>
-      <p:sp>
-        <p:nvSpPr>
-          <p:cNvPr id="9" name="Rounded Rectangle 8"/>
-          <p:cNvSpPr/>
-          <p:nvPr/>
-        </p:nvSpPr>
-        <p:spPr>
-          <a:xfrm>
-            <a:off x="731520" y="4663440"/>
-            <a:ext cx="5212080" cy="1508760"/>
-          </a:xfrm>
-          <a:prstGeom prst="roundRect">
-            <a:avLst/>
-          </a:prstGeom>
-          <a:solidFill>
-            <a:srgbClr val="F4F8F5"/>
-          </a:solidFill>
-          <a:ln w="19050">
-            <a:solidFill>
-              <a:srgbClr val="E98F71"/>
-            </a:solidFill>
-          </a:ln>
-        </p:spPr>
-        <p:style>
-          <a:lnRef idx="1">
-            <a:schemeClr val="accent1"/>
-          </a:lnRef>
-          <a:fillRef idx="3">
-            <a:schemeClr val="accent1"/>
-          </a:fillRef>
-          <a:effectRef idx="2">
-            <a:schemeClr val="accent1"/>
-          </a:effectRef>
-          <a:fontRef idx="minor">
-            <a:schemeClr val="lt1"/>
-          </a:fontRef>
-        </p:style>
-        <p:txBody>
-          <a:bodyPr wrap="square" lIns="182880" tIns="182880" rIns="182880" rtlCol="0" anchor="ctr"/>
-          <a:lstStyle/>
-          <a:p>
-            <a:pPr algn="ctr">
-              <a:spcAft>
-                <a:spcPts val="400"/>
-              </a:spcAft>
-              <a:defRPr sz="1600" b="1">
-                <a:solidFill>
-                  <a:srgbClr val="E98F71"/>
-                </a:solidFill>
-                <a:latin typeface="Outfit"/>
-              </a:defRPr>
-            </a:pPr>
-            <a:r>
-              <a:t>5. Rotación (Churning)</a:t>
-            </a:r>
-          </a:p>
-          <a:p>
-            <a:pPr>
-              <a:defRPr sz="1600">
-                <a:solidFill>
-                  <a:srgbClr val="2F3A30"/>
-                </a:solidFill>
-                <a:latin typeface="Calibri"/>
-              </a:defRPr>
-            </a:pPr>
-            <a:r>
-              <a:t>Despedir al trabajador justo cuando finaliza la permanencia obligatoria para contratar a otro subvencionado.</a:t>
-            </a:r>
-          </a:p>
-        </p:txBody>
-      </p:sp>
-      <p:sp>
-        <p:nvSpPr>
-          <p:cNvPr id="10" name="Rounded Rectangle 9"/>
-          <p:cNvSpPr/>
-          <p:nvPr/>
-        </p:nvSpPr>
-        <p:spPr>
-          <a:xfrm>
-            <a:off x="6126480" y="4663440"/>
-            <a:ext cx="5212080" cy="1508760"/>
+            <a:off x="6217920" y="1371600"/>
+            <a:ext cx="5212080" cy="4846320"/>
           </a:xfrm>
           <a:prstGeom prst="roundRect">
             <a:avLst/>
@@ -7397,27 +7522,30 @@
           </a:fontRef>
         </p:style>
         <p:txBody>
-          <a:bodyPr wrap="square" lIns="182880" tIns="182880" rIns="182880" rtlCol="0" anchor="ctr"/>
+          <a:bodyPr wrap="square" lIns="274320" tIns="274320" rIns="274320" rtlCol="0" anchor="ctr"/>
           <a:lstStyle/>
           <a:p>
             <a:pPr algn="ctr">
               <a:spcAft>
-                <a:spcPts val="400"/>
+                <a:spcPts val="600"/>
               </a:spcAft>
               <a:defRPr sz="1600" b="1">
                 <a:solidFill>
-                  <a:srgbClr val="76927A"/>
+                  <a:srgbClr val="113927"/>
                 </a:solidFill>
                 <a:latin typeface="Outfit"/>
               </a:defRPr>
             </a:pPr>
             <a:r>
-              <a:t>6. Efecto Estigma</a:t>
+              <a:t>⏱️ 3. Jornada Laboral y Cuantía Proporcional</a:t>
             </a:r>
           </a:p>
           <a:p>
             <a:pPr>
-              <a:defRPr sz="1600">
+              <a:spcAft>
+                <a:spcPts val="1400"/>
+              </a:spcAft>
+              <a:defRPr sz="1500">
                 <a:solidFill>
                   <a:srgbClr val="2F3A30"/>
                 </a:solidFill>
@@ -7425,7 +7553,44 @@
               </a:defRPr>
             </a:pPr>
             <a:r>
-              <a:t>La subvención actúa como una señal de baja productividad o conflicto, generando rechazo en los empleadores.</a:t>
+              <a:t>• Exigencia de jornada completa vs. tiempo parcial: Subvencionar jornadas muy reducidas genera precarización y subempleo involuntario.</a:t>
+            </a:r>
+            <a:br/>
+            <a:r>
+              <a:t>• La cuantía debe modularse proporcionalmente a las horas trabajadas (mínimo 50% de jornada) para evitar arbitrajes salariales.</a:t>
+            </a:r>
+          </a:p>
+          <a:p>
+            <a:pPr>
+              <a:spcAft>
+                <a:spcPts val="600"/>
+              </a:spcAft>
+              <a:defRPr sz="1600" b="1">
+                <a:solidFill>
+                  <a:srgbClr val="113927"/>
+                </a:solidFill>
+                <a:latin typeface="Outfit"/>
+              </a:defRPr>
+            </a:pPr>
+            <a:r>
+              <a:t>🔒 4. Cláusulas de Salvaguarda y Reintegro</a:t>
+            </a:r>
+          </a:p>
+          <a:p>
+            <a:pPr>
+              <a:defRPr sz="1500">
+                <a:solidFill>
+                  <a:srgbClr val="2F3A30"/>
+                </a:solidFill>
+                <a:latin typeface="Calibri"/>
+              </a:defRPr>
+            </a:pPr>
+            <a:r>
+              <a:t>• Compromiso de permanencia obligatoria (12 a 24 meses) y exigencia de incremento neto de plantilla.</a:t>
+            </a:r>
+            <a:br/>
+            <a:r>
+              <a:t>• Régimen sancionador disuasorio: Obligación de reintegro íntegro de la ayuda más intereses de demora si la empresa extingue el contrato improcedentemente antes del plazo.</a:t>
             </a:r>
           </a:p>
         </p:txBody>
@@ -7486,7 +7651,7 @@
               </a:defRPr>
             </a:pPr>
             <a:r>
-              <a:t>FASE 3 · FORMALIZACIÓN DEL EMPLEO NETO (45–75 MIN)</a:t>
+              <a:t>FASE 3 · ANATOMÍA DE LAS INEFICIENCIAS PÚBLICAS (45–75 MIN)</a:t>
             </a:r>
           </a:p>
         </p:txBody>
@@ -7522,7 +7687,7 @@
               </a:defRPr>
             </a:pPr>
             <a:r>
-              <a:t>La Cascada Analítica del Empleo Neto y su Formulación</a:t>
+              <a:t>Los 6 Efectos No Deseados de los Incentivos a la Contratación</a:t>
             </a:r>
           </a:p>
         </p:txBody>
@@ -7551,50 +7716,26 @@
           </a:prstGeom>
         </p:spPr>
       </p:pic>
-      <p:pic>
-        <p:nvPicPr>
-          <p:cNvPr id="5" name="Picture 4" descr="figura_2_1_incentivos_empleo_neto.png"/>
-          <p:cNvPicPr>
-            <a:picLocks noChangeAspect="1"/>
-          </p:cNvPicPr>
-          <p:nvPr/>
-        </p:nvPicPr>
-        <p:blipFill>
-          <a:blip r:embed="rId3"/>
-          <a:stretch>
-            <a:fillRect/>
-          </a:stretch>
-        </p:blipFill>
-        <p:spPr>
-          <a:xfrm>
-            <a:off x="731520" y="1371600"/>
-            <a:ext cx="7132320" cy="4846320"/>
-          </a:xfrm>
-          <a:prstGeom prst="rect">
-            <a:avLst/>
-          </a:prstGeom>
-        </p:spPr>
-      </p:pic>
-      <p:sp>
-        <p:nvSpPr>
-          <p:cNvPr id="6" name="Rounded Rectangle 5"/>
+      <p:sp>
+        <p:nvSpPr>
+          <p:cNvPr id="5" name="Rounded Rectangle 4"/>
           <p:cNvSpPr/>
           <p:nvPr/>
         </p:nvSpPr>
         <p:spPr>
           <a:xfrm>
-            <a:off x="8138160" y="1371600"/>
-            <a:ext cx="3291840" cy="4846320"/>
+            <a:off x="731520" y="1371600"/>
+            <a:ext cx="5212080" cy="1508760"/>
           </a:xfrm>
           <a:prstGeom prst="roundRect">
             <a:avLst/>
           </a:prstGeom>
           <a:solidFill>
-            <a:srgbClr val="113927"/>
+            <a:srgbClr val="F4F8F5"/>
           </a:solidFill>
-          <a:ln>
+          <a:ln w="19050">
             <a:solidFill>
-              <a:srgbClr val="113927"/>
+              <a:srgbClr val="E98F71"/>
             </a:solidFill>
           </a:ln>
         </p:spPr>
@@ -7613,79 +7754,390 @@
           </a:fontRef>
         </p:style>
         <p:txBody>
-          <a:bodyPr wrap="square" lIns="274320" tIns="274320" rIns="274320" rtlCol="0" anchor="ctr"/>
+          <a:bodyPr wrap="square" lIns="182880" tIns="182880" rIns="182880" rtlCol="0" anchor="ctr"/>
           <a:lstStyle/>
           <a:p>
             <a:pPr algn="ctr">
               <a:spcAft>
-                <a:spcPts val="1200"/>
+                <a:spcPts val="400"/>
               </a:spcAft>
-              <a:defRPr sz="1700" b="1">
-                <a:solidFill>
-                  <a:srgbClr val="EDB090"/>
+              <a:defRPr sz="1600" b="1">
+                <a:solidFill>
+                  <a:srgbClr val="E98F71"/>
                 </a:solidFill>
                 <a:latin typeface="Outfit"/>
               </a:defRPr>
             </a:pPr>
             <a:r>
-              <a:t>📐 La Fórmula Canónica (§4.4)</a:t>
+              <a:t>1. Peso Muerto (Deadweight)</a:t>
             </a:r>
           </a:p>
           <a:p>
             <a:pPr>
+              <a:defRPr sz="1600">
+                <a:solidFill>
+                  <a:srgbClr val="2F3A30"/>
+                </a:solidFill>
+                <a:latin typeface="Calibri"/>
+              </a:defRPr>
+            </a:pPr>
+            <a:r>
+              <a:t>Contrataciones subvencionadas que la empresa habría realizado igualmente sin la ayuda por necesidades de demanda. (60% - 80% del gasto).</a:t>
+            </a:r>
+          </a:p>
+        </p:txBody>
+      </p:sp>
+      <p:sp>
+        <p:nvSpPr>
+          <p:cNvPr id="6" name="Rounded Rectangle 5"/>
+          <p:cNvSpPr/>
+          <p:nvPr/>
+        </p:nvSpPr>
+        <p:spPr>
+          <a:xfrm>
+            <a:off x="6126480" y="1371600"/>
+            <a:ext cx="5212080" cy="1508760"/>
+          </a:xfrm>
+          <a:prstGeom prst="roundRect">
+            <a:avLst/>
+          </a:prstGeom>
+          <a:solidFill>
+            <a:srgbClr val="F4F8F5"/>
+          </a:solidFill>
+          <a:ln w="19050">
+            <a:solidFill>
+              <a:srgbClr val="113927"/>
+            </a:solidFill>
+          </a:ln>
+        </p:spPr>
+        <p:style>
+          <a:lnRef idx="1">
+            <a:schemeClr val="accent1"/>
+          </a:lnRef>
+          <a:fillRef idx="3">
+            <a:schemeClr val="accent1"/>
+          </a:fillRef>
+          <a:effectRef idx="2">
+            <a:schemeClr val="accent1"/>
+          </a:effectRef>
+          <a:fontRef idx="minor">
+            <a:schemeClr val="lt1"/>
+          </a:fontRef>
+        </p:style>
+        <p:txBody>
+          <a:bodyPr wrap="square" lIns="182880" tIns="182880" rIns="182880" rtlCol="0" anchor="ctr"/>
+          <a:lstStyle/>
+          <a:p>
+            <a:pPr algn="ctr">
               <a:spcAft>
-                <a:spcPts val="1400"/>
+                <a:spcPts val="400"/>
               </a:spcAft>
-              <a:defRPr sz="1500" b="1">
-                <a:solidFill>
-                  <a:srgbClr val="FFFFFF"/>
+              <a:defRPr sz="1600" b="1">
+                <a:solidFill>
+                  <a:srgbClr val="113927"/>
                 </a:solidFill>
                 <a:latin typeface="Outfit"/>
               </a:defRPr>
             </a:pPr>
             <a:r>
-              <a:t>Empleo neto = S · (1 − pm − s − d)</a:t>
+              <a:t>2. Efecto Sustitución</a:t>
             </a:r>
           </a:p>
           <a:p>
             <a:pPr>
+              <a:defRPr sz="1600">
+                <a:solidFill>
+                  <a:srgbClr val="2F3A30"/>
+                </a:solidFill>
+                <a:latin typeface="Calibri"/>
+              </a:defRPr>
+            </a:pPr>
+            <a:r>
+              <a:t>La empresa despide o no renueva a un trabajador ordinario para contratar a uno subvencionado, sin crear empleo neto.</a:t>
+            </a:r>
+          </a:p>
+        </p:txBody>
+      </p:sp>
+      <p:sp>
+        <p:nvSpPr>
+          <p:cNvPr id="7" name="Rounded Rectangle 6"/>
+          <p:cNvSpPr/>
+          <p:nvPr/>
+        </p:nvSpPr>
+        <p:spPr>
+          <a:xfrm>
+            <a:off x="731520" y="3017520"/>
+            <a:ext cx="5212080" cy="1508760"/>
+          </a:xfrm>
+          <a:prstGeom prst="roundRect">
+            <a:avLst/>
+          </a:prstGeom>
+          <a:solidFill>
+            <a:srgbClr val="F4F8F5"/>
+          </a:solidFill>
+          <a:ln w="19050">
+            <a:solidFill>
+              <a:srgbClr val="76927A"/>
+            </a:solidFill>
+          </a:ln>
+        </p:spPr>
+        <p:style>
+          <a:lnRef idx="1">
+            <a:schemeClr val="accent1"/>
+          </a:lnRef>
+          <a:fillRef idx="3">
+            <a:schemeClr val="accent1"/>
+          </a:fillRef>
+          <a:effectRef idx="2">
+            <a:schemeClr val="accent1"/>
+          </a:effectRef>
+          <a:fontRef idx="minor">
+            <a:schemeClr val="lt1"/>
+          </a:fontRef>
+        </p:style>
+        <p:txBody>
+          <a:bodyPr wrap="square" lIns="182880" tIns="182880" rIns="182880" rtlCol="0" anchor="ctr"/>
+          <a:lstStyle/>
+          <a:p>
+            <a:pPr algn="ctr">
               <a:spcAft>
-                <a:spcPts val="1200"/>
+                <a:spcPts val="400"/>
               </a:spcAft>
+              <a:defRPr sz="1600" b="1">
+                <a:solidFill>
+                  <a:srgbClr val="76927A"/>
+                </a:solidFill>
+                <a:latin typeface="Outfit"/>
+              </a:defRPr>
+            </a:pPr>
+            <a:r>
+              <a:t>3. Efecto Desplazamiento</a:t>
+            </a:r>
+          </a:p>
+          <a:p>
+            <a:pPr>
               <a:defRPr sz="1600">
                 <a:solidFill>
-                  <a:srgbClr val="F4F8F5"/>
+                  <a:srgbClr val="2F3A30"/>
                 </a:solidFill>
                 <a:latin typeface="Calibri"/>
               </a:defRPr>
             </a:pPr>
             <a:r>
-              <a:t>• S: Contrataciones subvencionadas.</a:t>
-            </a:r>
-            <a:br/>
-            <a:r>
-              <a:t>• pm: Proporción perdida por peso muerto (0,60 – 0,80).</a:t>
-            </a:r>
-            <a:br/>
-            <a:r>
-              <a:t>• s: Proporción perdida por sustitución (0,10 – 0,15).</a:t>
-            </a:r>
-            <a:br/>
-            <a:r>
-              <a:t>• d: Proporción perdida por desplazamiento (0,05).</a:t>
+              <a:t>Las empresas con ayudas reducen costes y expulsan del mercado a competidores eficientes no subvencionados.</a:t>
+            </a:r>
+          </a:p>
+        </p:txBody>
+      </p:sp>
+      <p:sp>
+        <p:nvSpPr>
+          <p:cNvPr id="8" name="Rounded Rectangle 7"/>
+          <p:cNvSpPr/>
+          <p:nvPr/>
+        </p:nvSpPr>
+        <p:spPr>
+          <a:xfrm>
+            <a:off x="6126480" y="3017520"/>
+            <a:ext cx="5212080" cy="1508760"/>
+          </a:xfrm>
+          <a:prstGeom prst="roundRect">
+            <a:avLst/>
+          </a:prstGeom>
+          <a:solidFill>
+            <a:srgbClr val="F4F8F5"/>
+          </a:solidFill>
+          <a:ln w="19050">
+            <a:solidFill>
+              <a:srgbClr val="113927"/>
+            </a:solidFill>
+          </a:ln>
+        </p:spPr>
+        <p:style>
+          <a:lnRef idx="1">
+            <a:schemeClr val="accent1"/>
+          </a:lnRef>
+          <a:fillRef idx="3">
+            <a:schemeClr val="accent1"/>
+          </a:fillRef>
+          <a:effectRef idx="2">
+            <a:schemeClr val="accent1"/>
+          </a:effectRef>
+          <a:fontRef idx="minor">
+            <a:schemeClr val="lt1"/>
+          </a:fontRef>
+        </p:style>
+        <p:txBody>
+          <a:bodyPr wrap="square" lIns="182880" tIns="182880" rIns="182880" rtlCol="0" anchor="ctr"/>
+          <a:lstStyle/>
+          <a:p>
+            <a:pPr algn="ctr">
+              <a:spcAft>
+                <a:spcPts val="400"/>
+              </a:spcAft>
+              <a:defRPr sz="1600" b="1">
+                <a:solidFill>
+                  <a:srgbClr val="113927"/>
+                </a:solidFill>
+                <a:latin typeface="Outfit"/>
+              </a:defRPr>
+            </a:pPr>
+            <a:r>
+              <a:t>4. Descremado (Creaming)</a:t>
             </a:r>
           </a:p>
           <a:p>
             <a:pPr>
+              <a:defRPr sz="1600">
+                <a:solidFill>
+                  <a:srgbClr val="2F3A30"/>
+                </a:solidFill>
+                <a:latin typeface="Calibri"/>
+              </a:defRPr>
+            </a:pPr>
+            <a:r>
+              <a:t>El empleador selecciona dentro del colectivo subvencionado a los candidatos más cualificados, excluyendo a los más vulnerables.</a:t>
+            </a:r>
+          </a:p>
+        </p:txBody>
+      </p:sp>
+      <p:sp>
+        <p:nvSpPr>
+          <p:cNvPr id="9" name="Rounded Rectangle 8"/>
+          <p:cNvSpPr/>
+          <p:nvPr/>
+        </p:nvSpPr>
+        <p:spPr>
+          <a:xfrm>
+            <a:off x="731520" y="4663440"/>
+            <a:ext cx="5212080" cy="1508760"/>
+          </a:xfrm>
+          <a:prstGeom prst="roundRect">
+            <a:avLst/>
+          </a:prstGeom>
+          <a:solidFill>
+            <a:srgbClr val="F4F8F5"/>
+          </a:solidFill>
+          <a:ln w="19050">
+            <a:solidFill>
+              <a:srgbClr val="E98F71"/>
+            </a:solidFill>
+          </a:ln>
+        </p:spPr>
+        <p:style>
+          <a:lnRef idx="1">
+            <a:schemeClr val="accent1"/>
+          </a:lnRef>
+          <a:fillRef idx="3">
+            <a:schemeClr val="accent1"/>
+          </a:fillRef>
+          <a:effectRef idx="2">
+            <a:schemeClr val="accent1"/>
+          </a:effectRef>
+          <a:fontRef idx="minor">
+            <a:schemeClr val="lt1"/>
+          </a:fontRef>
+        </p:style>
+        <p:txBody>
+          <a:bodyPr wrap="square" lIns="182880" tIns="182880" rIns="182880" rtlCol="0" anchor="ctr"/>
+          <a:lstStyle/>
+          <a:p>
+            <a:pPr algn="ctr">
+              <a:spcAft>
+                <a:spcPts val="400"/>
+              </a:spcAft>
               <a:defRPr sz="1600" b="1">
                 <a:solidFill>
                   <a:srgbClr val="E98F71"/>
                 </a:solidFill>
+                <a:latin typeface="Outfit"/>
+              </a:defRPr>
+            </a:pPr>
+            <a:r>
+              <a:t>5. Rotación (Churning)</a:t>
+            </a:r>
+          </a:p>
+          <a:p>
+            <a:pPr>
+              <a:defRPr sz="1600">
+                <a:solidFill>
+                  <a:srgbClr val="2F3A30"/>
+                </a:solidFill>
                 <a:latin typeface="Calibri"/>
               </a:defRPr>
             </a:pPr>
             <a:r>
-              <a:t>¡Solo el empleo neto reduce de forma estructural la tasa de desempleo!</a:t>
+              <a:t>Despedir al trabajador justo cuando finaliza la permanencia obligatoria para contratar a otro subvencionado.</a:t>
+            </a:r>
+          </a:p>
+        </p:txBody>
+      </p:sp>
+      <p:sp>
+        <p:nvSpPr>
+          <p:cNvPr id="10" name="Rounded Rectangle 9"/>
+          <p:cNvSpPr/>
+          <p:nvPr/>
+        </p:nvSpPr>
+        <p:spPr>
+          <a:xfrm>
+            <a:off x="6126480" y="4663440"/>
+            <a:ext cx="5212080" cy="1508760"/>
+          </a:xfrm>
+          <a:prstGeom prst="roundRect">
+            <a:avLst/>
+          </a:prstGeom>
+          <a:solidFill>
+            <a:srgbClr val="F4F8F5"/>
+          </a:solidFill>
+          <a:ln w="19050">
+            <a:solidFill>
+              <a:srgbClr val="76927A"/>
+            </a:solidFill>
+          </a:ln>
+        </p:spPr>
+        <p:style>
+          <a:lnRef idx="1">
+            <a:schemeClr val="accent1"/>
+          </a:lnRef>
+          <a:fillRef idx="3">
+            <a:schemeClr val="accent1"/>
+          </a:fillRef>
+          <a:effectRef idx="2">
+            <a:schemeClr val="accent1"/>
+          </a:effectRef>
+          <a:fontRef idx="minor">
+            <a:schemeClr val="lt1"/>
+          </a:fontRef>
+        </p:style>
+        <p:txBody>
+          <a:bodyPr wrap="square" lIns="182880" tIns="182880" rIns="182880" rtlCol="0" anchor="ctr"/>
+          <a:lstStyle/>
+          <a:p>
+            <a:pPr algn="ctr">
+              <a:spcAft>
+                <a:spcPts val="400"/>
+              </a:spcAft>
+              <a:defRPr sz="1600" b="1">
+                <a:solidFill>
+                  <a:srgbClr val="76927A"/>
+                </a:solidFill>
+                <a:latin typeface="Outfit"/>
+              </a:defRPr>
+            </a:pPr>
+            <a:r>
+              <a:t>6. Efecto Estigma</a:t>
+            </a:r>
+          </a:p>
+          <a:p>
+            <a:pPr>
+              <a:defRPr sz="1600">
+                <a:solidFill>
+                  <a:srgbClr val="2F3A30"/>
+                </a:solidFill>
+                <a:latin typeface="Calibri"/>
+              </a:defRPr>
+            </a:pPr>
+            <a:r>
+              <a:t>La subvención actúa como una señal de baja productividad o conflicto, generando rechazo en los empleadores.</a:t>
             </a:r>
           </a:p>
         </p:txBody>
@@ -7746,7 +8198,7 @@
               </a:defRPr>
             </a:pPr>
             <a:r>
-              <a:t>FASE 3 · DEDUCCIÓN MATEMÁTICA Y ANÁLISIS DE COSTES (45–75 MIN)</a:t>
+              <a:t>FASE 3 · EVIDENCIA EMPÍRICA Y EVALUACIÓN CIENTÍFICA (45–75 MIN)</a:t>
             </a:r>
           </a:p>
         </p:txBody>
@@ -7782,14 +8234,14 @@
               </a:defRPr>
             </a:pPr>
             <a:r>
-              <a:t>El Multiplicador Inverso del Coste Fiscal por Empleo Neto</a:t>
+              <a:t>Experimentos de Campo: El Experimento de Dayton y el Efecto Estigma</a:t>
             </a:r>
           </a:p>
         </p:txBody>
       </p:sp>
       <p:pic>
         <p:nvPicPr>
-          <p:cNvPr id="4" name="Picture 3" descr="psll_lockup.png"/>
+          <p:cNvPr id="4" name="Picture 3" descr="image.png"/>
           <p:cNvPicPr>
             <a:picLocks noChangeAspect="1"/>
           </p:cNvPicPr>
@@ -7820,7 +8272,7 @@
         <p:spPr>
           <a:xfrm>
             <a:off x="731520" y="1371600"/>
-            <a:ext cx="5394960" cy="4846320"/>
+            <a:ext cx="5212080" cy="4846320"/>
           </a:xfrm>
           <a:prstGeom prst="roundRect">
             <a:avLst/>
@@ -7830,7 +8282,7 @@
           </a:solidFill>
           <a:ln w="19050">
             <a:solidFill>
-              <a:srgbClr val="76927A"/>
+              <a:srgbClr val="E98F71"/>
             </a:solidFill>
           </a:ln>
         </p:spPr>
@@ -7854,24 +8306,24 @@
           <a:p>
             <a:pPr algn="ctr">
               <a:spcAft>
+                <a:spcPts val="800"/>
+              </a:spcAft>
+              <a:defRPr sz="1600" b="1">
+                <a:solidFill>
+                  <a:srgbClr val="113927"/>
+                </a:solidFill>
+                <a:latin typeface="Outfit"/>
+              </a:defRPr>
+            </a:pPr>
+            <a:r>
+              <a:t>🧪 El Clásico Experimento de Dayton (Burtless, 1985)</a:t>
+            </a:r>
+          </a:p>
+          <a:p>
+            <a:pPr>
+              <a:spcAft>
                 <a:spcPts val="1000"/>
               </a:spcAft>
-              <a:defRPr sz="1700" b="1">
-                <a:solidFill>
-                  <a:srgbClr val="113927"/>
-                </a:solidFill>
-                <a:latin typeface="Outfit"/>
-              </a:defRPr>
-            </a:pPr>
-            <a:r>
-              <a:t>🧮 Deducción Paso a Paso de la Expresión</a:t>
-            </a:r>
-          </a:p>
-          <a:p>
-            <a:pPr>
-              <a:spcAft>
-                <a:spcPts val="800"/>
-              </a:spcAft>
               <a:defRPr sz="1500">
                 <a:solidFill>
                   <a:srgbClr val="2F3A30"/>
@@ -7880,31 +8332,7 @@
               </a:defRPr>
             </a:pPr>
             <a:r>
-              <a:t>1. Gasto Público Total:</a:t>
-            </a:r>
-            <a:br/>
-            <a:r>
-              <a:t>   Gasto = S · (Subvención nominal por contrato)</a:t>
-            </a:r>
-          </a:p>
-          <a:p>
-            <a:pPr>
-              <a:spcAft>
-                <a:spcPts val="800"/>
-              </a:spcAft>
-              <a:defRPr sz="1500">
-                <a:solidFill>
-                  <a:srgbClr val="2F3A30"/>
-                </a:solidFill>
-                <a:latin typeface="Calibri"/>
-              </a:defRPr>
-            </a:pPr>
-            <a:r>
-              <a:t>2. Empleo Neto Efectivo Creado:</a:t>
-            </a:r>
-            <a:br/>
-            <a:r>
-              <a:t>   Empleo neto = S · (1 − pm − s − d)</a:t>
+              <a:t>• El diseño experimental en Ohio (EE.UU.): A un grupo aleatorio de perceptores de asistencia social se les entregó un bono de subvención salarial para que lo presentaran en las entrevistas de trabajo. Un grupo de control buscó empleo sin bono.</a:t>
             </a:r>
           </a:p>
           <a:p>
@@ -7914,42 +8342,26 @@
               </a:spcAft>
               <a:defRPr sz="1500" b="1">
                 <a:solidFill>
-                  <a:srgbClr val="113927"/>
+                  <a:srgbClr val="E98F71"/>
                 </a:solidFill>
                 <a:latin typeface="Calibri"/>
               </a:defRPr>
             </a:pPr>
             <a:r>
-              <a:t>3. Coste Fiscal Efectivo por Empleo Neto:</a:t>
-            </a:r>
-            <a:br/>
-            <a:r>
-              <a:t>   Coste Neto = Gasto Total / Empleo Neto</a:t>
-            </a:r>
-            <a:br/>
-            <a:r>
-              <a:t>   Coste Neto = [S · Subvención] / [S · (1 − pm − s − d)]</a:t>
+              <a:t>• El resultado paradójico: ¡Los portadores del bono consiguieron significativamente MENOS empleo que el grupo sin ayuda (20,6% frente al 39,9%)!</a:t>
             </a:r>
           </a:p>
           <a:p>
             <a:pPr>
-              <a:defRPr sz="1500" b="1">
-                <a:solidFill>
-                  <a:srgbClr val="E98F71"/>
-                </a:solidFill>
-                <a:latin typeface="Outfit"/>
-              </a:defRPr>
-            </a:pPr>
-            <a:r>
-              <a:t>4. Expresión Final de los Apuntes (§4.4):</a:t>
-            </a:r>
-            <a:br/>
-            <a:r>
-              <a:t>   Coste Neto = Subvención / (1 − pm − s − d)</a:t>
-            </a:r>
-            <a:br/>
-            <a:r>
-              <a:t>   = Subvención · [ 1 / (1 − Pérdida Total) ]</a:t>
+              <a:defRPr sz="1500">
+                <a:solidFill>
+                  <a:srgbClr val="2F3A30"/>
+                </a:solidFill>
+                <a:latin typeface="Calibri"/>
+              </a:defRPr>
+            </a:pPr>
+            <a:r>
+              <a:t>• Explicación económica: Efecto Estigma y Señal Adversa. Los empresarios dedujeron que si el Gobierno tenía que pagarles para colocar al trabajador, era porque tenía baja productividad o problemas no observables.</a:t>
             </a:r>
           </a:p>
         </p:txBody>
@@ -7962,8 +8374,8 @@
         </p:nvSpPr>
         <p:spPr>
           <a:xfrm>
-            <a:off x="6400800" y="1371600"/>
-            <a:ext cx="5029200" cy="4846320"/>
+            <a:off x="6217920" y="1371600"/>
+            <a:ext cx="5212080" cy="4846320"/>
           </a:xfrm>
           <a:prstGeom prst="roundRect">
             <a:avLst/>
@@ -7997,9 +8409,9 @@
           <a:p>
             <a:pPr algn="ctr">
               <a:spcAft>
-                <a:spcPts val="1000"/>
+                <a:spcPts val="800"/>
               </a:spcAft>
-              <a:defRPr sz="1700" b="1">
+              <a:defRPr sz="1600" b="1">
                 <a:solidFill>
                   <a:srgbClr val="EDB090"/>
                 </a:solidFill>
@@ -8007,23 +8419,7 @@
               </a:defRPr>
             </a:pPr>
             <a:r>
-              <a:t>📈 Efecto Amplificador (Subvención: 6.000 €)</a:t>
-            </a:r>
-          </a:p>
-          <a:p>
-            <a:pPr>
-              <a:spcAft>
-                <a:spcPts val="1000"/>
-              </a:spcAft>
-              <a:defRPr sz="1400">
-                <a:solidFill>
-                  <a:srgbClr val="F4F8F5"/>
-                </a:solidFill>
-                <a:latin typeface="Calibri"/>
-              </a:defRPr>
-            </a:pPr>
-            <a:r>
-              <a:t>A medida que la ineficiencia (pm + s + d) aumenta, el denominador tiende a cero y el coste tiende a infinito:</a:t>
+              <a:t>📚 Evidencia Internacional de Peso Muerto</a:t>
             </a:r>
           </a:p>
           <a:p>
@@ -8031,7 +8427,7 @@
               <a:spcAft>
                 <a:spcPts val="1200"/>
               </a:spcAft>
-              <a:defRPr sz="1500" b="1">
+              <a:defRPr sz="1500">
                 <a:solidFill>
                   <a:srgbClr val="FFFFFF"/>
                 </a:solidFill>
@@ -8039,27 +8435,23 @@
               </a:defRPr>
             </a:pPr>
             <a:r>
-              <a:t>• Pérdida 0%:   Multiplicador = 1,0x  ➜  6.000 €</a:t>
-            </a:r>
-            <a:br/>
-            <a:r>
-              <a:t>• Pérdida 50%: Multiplicador = 2,0x  ➜ 12.000 €</a:t>
-            </a:r>
-            <a:br/>
-            <a:r>
-              <a:t>• Pérdida 75%: Multiplicador = 4,0x  ➜ 24.000 € (Apuntes)</a:t>
-            </a:r>
-            <a:br/>
-            <a:r>
-              <a:t>• Pérdida 80%: Multiplicador = 5,0x  ➜ 30.000 € (AIReF)</a:t>
-            </a:r>
-            <a:br/>
-            <a:r>
-              <a:t>• Pérdida 85%: Multiplicador = 6,7x  ➜ 40.000 €</a:t>
-            </a:r>
-            <a:br/>
-            <a:r>
-              <a:t>• Pérdida 90%: Multiplicador = 10,0x ➜ 60.000 €</a:t>
+              <a:t>• Estudio de Brown (2015 · Francia): En programas de subvención salarial general a trabajadores de salarios bajos, el 84% de las contrataciones se habrían producido exactamente igual sin ayuda pública.</a:t>
+            </a:r>
+          </a:p>
+          <a:p>
+            <a:pPr>
+              <a:spcAft>
+                <a:spcPts val="1200"/>
+              </a:spcAft>
+              <a:defRPr sz="1500">
+                <a:solidFill>
+                  <a:srgbClr val="FFFFFF"/>
+                </a:solidFill>
+                <a:latin typeface="Calibri"/>
+              </a:defRPr>
+            </a:pPr>
+            <a:r>
+              <a:t>• Dictamen AIReF sobre el Contrato de Emprendedores: La bonificación aumentó ligeramente la probabilidad de empleo al inicio, pero tras expirar la ayuda la supervivencia laboral de los beneficiarios se igualó al resto.</a:t>
             </a:r>
           </a:p>
           <a:p>
@@ -8072,7 +8464,7 @@
               </a:defRPr>
             </a:pPr>
             <a:r>
-              <a:t>⚠️ Regla de Oro: Un programa con 80% de peso muerto quintuplica el coste real de cada empleo creado.</a:t>
+              <a:t>💡 Conclusión Teórica: Las subvenciones monetarias puras no corrigen las carencias formativas ni aumentan la productividad de equilibrio.</a:t>
             </a:r>
           </a:p>
         </p:txBody>
@@ -8133,7 +8525,7 @@
               </a:defRPr>
             </a:pPr>
             <a:r>
-              <a:t>FASE 3 · EVALUACIÓN DEL COSTE FISCAL EFECTIVO (45–75 MIN)</a:t>
+              <a:t>FASE 3 · FORMALIZACIÓN DEL EMPLEO NETO (45–75 MIN)</a:t>
             </a:r>
           </a:p>
         </p:txBody>
@@ -8169,7 +8561,7 @@
               </a:defRPr>
             </a:pPr>
             <a:r>
-              <a:t>La Curva Hiperbólica del Coste por Empleo Neto</a:t>
+              <a:t>La Cascada Analítica del Empleo Neto y su Formulación</a:t>
             </a:r>
           </a:p>
         </p:txBody>
@@ -8200,7 +8592,7 @@
       </p:pic>
       <p:pic>
         <p:nvPicPr>
-          <p:cNvPr id="5" name="Picture 4" descr="figura_coste_empleo_neto.png"/>
+          <p:cNvPr id="5" name="Picture 4" descr="figura_2_1_incentivos_empleo_neto.png"/>
           <p:cNvPicPr>
             <a:picLocks noChangeAspect="1"/>
           </p:cNvPicPr>
@@ -8237,11 +8629,11 @@
             <a:avLst/>
           </a:prstGeom>
           <a:solidFill>
-            <a:srgbClr val="F4F8F5"/>
+            <a:srgbClr val="113927"/>
           </a:solidFill>
-          <a:ln w="19050">
+          <a:ln>
             <a:solidFill>
-              <a:srgbClr val="E98F71"/>
+              <a:srgbClr val="113927"/>
             </a:solidFill>
           </a:ln>
         </p:spPr>
@@ -8265,17 +8657,33 @@
           <a:p>
             <a:pPr algn="ctr">
               <a:spcAft>
-                <a:spcPts val="1000"/>
+                <a:spcPts val="1200"/>
               </a:spcAft>
               <a:defRPr sz="1700" b="1">
                 <a:solidFill>
-                  <a:srgbClr val="113927"/>
+                  <a:srgbClr val="EDB090"/>
                 </a:solidFill>
                 <a:latin typeface="Outfit"/>
               </a:defRPr>
             </a:pPr>
             <a:r>
-              <a:t>💡 Lección de Hacienda Pública</a:t>
+              <a:t>📐 La Fórmula Canónica (§4.4)</a:t>
+            </a:r>
+          </a:p>
+          <a:p>
+            <a:pPr>
+              <a:spcAft>
+                <a:spcPts val="1400"/>
+              </a:spcAft>
+              <a:defRPr sz="1500" b="1">
+                <a:solidFill>
+                  <a:srgbClr val="FFFFFF"/>
+                </a:solidFill>
+                <a:latin typeface="Outfit"/>
+              </a:defRPr>
+            </a:pPr>
+            <a:r>
+              <a:t>Empleo neto = S · (1 − pm − s − d)</a:t>
             </a:r>
           </a:p>
           <a:p>
@@ -8283,72 +8691,40 @@
               <a:spcAft>
                 <a:spcPts val="1200"/>
               </a:spcAft>
-              <a:defRPr sz="1400" b="1">
+              <a:defRPr sz="1600">
+                <a:solidFill>
+                  <a:srgbClr val="F4F8F5"/>
+                </a:solidFill>
+                <a:latin typeface="Calibri"/>
+              </a:defRPr>
+            </a:pPr>
+            <a:r>
+              <a:t>• S: Contrataciones subvencionadas.</a:t>
+            </a:r>
+            <a:br/>
+            <a:r>
+              <a:t>• pm: Proporción perdida por peso muerto (0,60 – 0,80).</a:t>
+            </a:r>
+            <a:br/>
+            <a:r>
+              <a:t>• s: Proporción perdida por sustitución (0,10 – 0,15).</a:t>
+            </a:r>
+            <a:br/>
+            <a:r>
+              <a:t>• d: Proporción perdida por desplazamiento (0,05).</a:t>
+            </a:r>
+          </a:p>
+          <a:p>
+            <a:pPr>
+              <a:defRPr sz="1600" b="1">
                 <a:solidFill>
                   <a:srgbClr val="E98F71"/>
                 </a:solidFill>
-                <a:latin typeface="Outfit"/>
-              </a:defRPr>
-            </a:pPr>
-            <a:r>
-              <a:t>Coste Neto = Subvención / [1 - Pérdida Total]</a:t>
-            </a:r>
-          </a:p>
-          <a:p>
-            <a:pPr>
-              <a:spcAft>
-                <a:spcPts val="1000"/>
-              </a:spcAft>
-              <a:defRPr sz="1600" b="1">
-                <a:solidFill>
-                  <a:srgbClr val="2F3A30"/>
-                </a:solidFill>
                 <a:latin typeface="Calibri"/>
               </a:defRPr>
             </a:pPr>
             <a:r>
-              <a:t>• Con 0% ineficiencia:</a:t>
-            </a:r>
-            <a:br/>
-            <a:r>
-              <a:t>  Coste = 6.000 €</a:t>
-            </a:r>
-            <a:br/>
-            <a:r>
-              <a:t>• Con 50% ineficiencia:</a:t>
-            </a:r>
-            <a:br/>
-            <a:r>
-              <a:t>  Coste = 12.000 €</a:t>
-            </a:r>
-            <a:br/>
-            <a:r>
-              <a:t>• Con 70% ineficiencia:</a:t>
-            </a:r>
-            <a:br/>
-            <a:r>
-              <a:t>  Coste = 20.000 €</a:t>
-            </a:r>
-            <a:br/>
-            <a:r>
-              <a:t>• Con 85% ineficiencia:</a:t>
-            </a:r>
-            <a:br/>
-            <a:r>
-              <a:t>  Coste = 40.000 € por empleo neto!</a:t>
-            </a:r>
-          </a:p>
-          <a:p>
-            <a:pPr>
-              <a:defRPr sz="1500">
-                <a:solidFill>
-                  <a:srgbClr val="64748B"/>
-                </a:solidFill>
-                <a:latin typeface="Calibri"/>
-              </a:defRPr>
-            </a:pPr>
-            <a:r>
-              <a:t>El dinero público no es gratis: financiar contrataciones rutinarias dispara el coste a niveles socialmente inasumibles.</a:t>
+              <a:t>¡Solo el empleo neto reduce de forma estructural la tasa de desempleo!</a:t>
             </a:r>
           </a:p>
         </p:txBody>
